--- a/SGBOTS.pptx
+++ b/SGBOTS.pptx
@@ -10,21 +10,21 @@
     <p:sldId id="268" r:id="rId7"/>
     <p:sldId id="269" r:id="rId8"/>
     <p:sldId id="270" r:id="rId9"/>
-    <p:sldId id="274" r:id="rId10"/>
-    <p:sldId id="271" r:id="rId11"/>
-    <p:sldId id="264" r:id="rId12"/>
-    <p:sldId id="262" r:id="rId13"/>
-    <p:sldId id="290" r:id="rId14"/>
-    <p:sldId id="263" r:id="rId15"/>
-    <p:sldId id="276" r:id="rId16"/>
-    <p:sldId id="287" r:id="rId17"/>
-    <p:sldId id="288" r:id="rId18"/>
-    <p:sldId id="292" r:id="rId19"/>
-    <p:sldId id="289" r:id="rId20"/>
-    <p:sldId id="272" r:id="rId21"/>
-    <p:sldId id="277" r:id="rId22"/>
+    <p:sldId id="288" r:id="rId10"/>
+    <p:sldId id="263" r:id="rId11"/>
+    <p:sldId id="292" r:id="rId12"/>
+    <p:sldId id="271" r:id="rId13"/>
+    <p:sldId id="264" r:id="rId14"/>
+    <p:sldId id="287" r:id="rId15"/>
+    <p:sldId id="262" r:id="rId16"/>
+    <p:sldId id="276" r:id="rId17"/>
+    <p:sldId id="290" r:id="rId18"/>
+    <p:sldId id="272" r:id="rId19"/>
+    <p:sldId id="277" r:id="rId20"/>
+    <p:sldId id="289" r:id="rId21"/>
+    <p:sldId id="275" r:id="rId22"/>
     <p:sldId id="273" r:id="rId23"/>
-    <p:sldId id="275" r:id="rId24"/>
+    <p:sldId id="274" r:id="rId24"/>
   </p:sldIdLst>
   <p:sldSz cx="12192000" cy="6858000"/>
   <p:notesSz cx="6858000" cy="9144000"/>
@@ -2402,10 +2402,10 @@
         <a:lstStyle/>
         <a:p>
           <a:r>
-            <a:rPr lang="en-US" b="1" baseline="0"/>
-            <a:t>Use AI models to automatically detect personally identifiable information (PII) in CSV or Parquet files.</a:t>
+            <a:rPr lang="en-US" b="1" baseline="0" dirty="0"/>
+            <a:t>Use DI models to automatically detect personally identifiable information (PII) in CSV or Parquet files.</a:t>
           </a:r>
-          <a:endParaRPr lang="en-US"/>
+          <a:endParaRPr lang="en-US" dirty="0"/>
         </a:p>
       </dgm:t>
     </dgm:pt>
@@ -3697,10 +3697,10 @@
             <a:buNone/>
           </a:pPr>
           <a:r>
-            <a:rPr lang="en-US" sz="1700" b="1" kern="1200" baseline="0"/>
-            <a:t>Use AI models to automatically detect personally identifiable information (PII) in CSV or Parquet files.</a:t>
+            <a:rPr lang="en-US" sz="1700" b="1" kern="1200" baseline="0" dirty="0"/>
+            <a:t>Use DI models to automatically detect personally identifiable information (PII) in CSV or Parquet files.</a:t>
           </a:r>
-          <a:endParaRPr lang="en-US" sz="1700" kern="1200"/>
+          <a:endParaRPr lang="en-US" sz="1700" kern="1200" dirty="0"/>
         </a:p>
       </dsp:txBody>
       <dsp:txXfrm>
@@ -11407,7 +11407,7 @@
           <a:p>
             <a:fld id="{D42BA25B-7083-4535-ACF9-F4E01E2D5E09}" type="datetimeFigureOut">
               <a:rPr lang="en-IN" smtClean="0"/>
-              <a:t>31-08-2025</a:t>
+              <a:t>02-09-2025</a:t>
             </a:fld>
             <a:endParaRPr lang="en-IN"/>
           </a:p>
@@ -11607,7 +11607,7 @@
           <a:p>
             <a:fld id="{D42BA25B-7083-4535-ACF9-F4E01E2D5E09}" type="datetimeFigureOut">
               <a:rPr lang="en-IN" smtClean="0"/>
-              <a:t>31-08-2025</a:t>
+              <a:t>02-09-2025</a:t>
             </a:fld>
             <a:endParaRPr lang="en-IN"/>
           </a:p>
@@ -17797,7 +17797,7 @@
           <a:p>
             <a:fld id="{D42BA25B-7083-4535-ACF9-F4E01E2D5E09}" type="datetimeFigureOut">
               <a:rPr lang="en-IN" smtClean="0"/>
-              <a:t>31-08-2025</a:t>
+              <a:t>02-09-2025</a:t>
             </a:fld>
             <a:endParaRPr lang="en-IN"/>
           </a:p>
@@ -17997,7 +17997,7 @@
           <a:p>
             <a:fld id="{D42BA25B-7083-4535-ACF9-F4E01E2D5E09}" type="datetimeFigureOut">
               <a:rPr lang="en-IN" smtClean="0"/>
-              <a:t>31-08-2025</a:t>
+              <a:t>02-09-2025</a:t>
             </a:fld>
             <a:endParaRPr lang="en-IN"/>
           </a:p>
@@ -22092,8 +22092,8 @@
         </p:nvSpPr>
         <p:spPr>
           <a:xfrm>
-            <a:off x="5088001" y="219000"/>
-            <a:ext cx="516873" cy="184602"/>
+            <a:off x="9144000" y="868680"/>
+            <a:ext cx="438514" cy="165858"/>
           </a:xfrm>
           <a:prstGeom prst="rect">
             <a:avLst/>
@@ -22102,7 +22102,7 @@
         </p:spPr>
         <p:txBody>
           <a:bodyPr vert="horz" wrap="none" lIns="0" tIns="0" rIns="0" bIns="0" rtlCol="0" anchor="ctr">
-            <a:normAutofit fontScale="25000" lnSpcReduction="20000"/>
+            <a:noAutofit/>
           </a:bodyPr>
           <a:lstStyle/>
           <a:p>
@@ -22122,7 +22122,7 @@
               <a:buSzPct val="90000"/>
             </a:pPr>
             <a:r>
-              <a:rPr lang="en-US" sz="300" b="0" kern="1200" cap="all" spc="267" baseline="0" noProof="0" dirty="0">
+              <a:rPr lang="en-US" sz="1200" b="0" kern="1200" cap="all" spc="267" baseline="0" noProof="0" dirty="0">
                 <a:latin typeface="Source Sans Pro" panose="020B0503030403020204" pitchFamily="34" charset="0"/>
                 <a:ea typeface="+mn-ea"/>
                 <a:cs typeface="+mn-cs"/>
@@ -22147,7 +22147,7 @@
               <a:buSzPct val="90000"/>
             </a:pPr>
             <a:r>
-              <a:rPr lang="en-US" sz="300" b="0" kern="1200" cap="all" spc="267" baseline="0" noProof="0" dirty="0">
+              <a:rPr lang="en-US" sz="1200" b="0" kern="1200" cap="all" spc="267" baseline="0" noProof="0" dirty="0">
                 <a:latin typeface="Source Sans Pro" panose="020B0503030403020204" pitchFamily="34" charset="0"/>
                 <a:ea typeface="+mn-ea"/>
                 <a:cs typeface="+mn-cs"/>
@@ -22172,7 +22172,7 @@
               <a:buSzPct val="90000"/>
             </a:pPr>
             <a:r>
-              <a:rPr lang="en-US" sz="300" b="0" kern="1200" cap="all" spc="267" baseline="0" noProof="0" dirty="0">
+              <a:rPr lang="en-US" sz="1200" b="0" kern="1200" cap="all" spc="267" baseline="0" noProof="0" dirty="0">
                 <a:latin typeface="Source Sans Pro" panose="020B0503030403020204" pitchFamily="34" charset="0"/>
                 <a:ea typeface="+mn-ea"/>
                 <a:cs typeface="+mn-cs"/>
@@ -22197,7 +22197,7 @@
               <a:buSzPct val="90000"/>
             </a:pPr>
             <a:r>
-              <a:rPr lang="en-US" sz="300" b="0" kern="1200" cap="all" spc="267" baseline="0" noProof="0" dirty="0">
+              <a:rPr lang="en-US" sz="1200" b="0" kern="1200" cap="all" spc="267" baseline="0" noProof="0" dirty="0">
                 <a:latin typeface="Source Sans Pro" panose="020B0503030403020204" pitchFamily="34" charset="0"/>
                 <a:ea typeface="+mn-ea"/>
                 <a:cs typeface="+mn-cs"/>
@@ -22222,7 +22222,7 @@
               <a:buSzPct val="90000"/>
             </a:pPr>
             <a:r>
-              <a:rPr lang="en-US" sz="300" b="0" kern="1200" cap="all" spc="267" baseline="0" noProof="0" dirty="0">
+              <a:rPr lang="en-US" sz="1200" b="0" kern="1200" cap="all" spc="267" baseline="0" noProof="0" dirty="0">
                 <a:latin typeface="Source Sans Pro" panose="020B0503030403020204" pitchFamily="34" charset="0"/>
                 <a:ea typeface="+mn-ea"/>
                 <a:cs typeface="+mn-cs"/>
@@ -22246,309 +22246,6 @@
 </file>
 
 <file path=ppt/slides/slide10.xml><?xml version="1.0" encoding="utf-8"?>
-<p:sld xmlns:a="http://schemas.openxmlformats.org/drawingml/2006/main" xmlns:r="http://schemas.openxmlformats.org/officeDocument/2006/relationships" xmlns:p="http://schemas.openxmlformats.org/presentationml/2006/main">
-  <p:cSld>
-    <p:spTree>
-      <p:nvGrpSpPr>
-        <p:cNvPr id="1" name=""/>
-        <p:cNvGrpSpPr/>
-        <p:nvPr/>
-      </p:nvGrpSpPr>
-      <p:grpSpPr>
-        <a:xfrm>
-          <a:off x="0" y="0"/>
-          <a:ext cx="0" cy="0"/>
-          <a:chOff x="0" y="0"/>
-          <a:chExt cx="0" cy="0"/>
-        </a:xfrm>
-      </p:grpSpPr>
-      <p:sp>
-        <p:nvSpPr>
-          <p:cNvPr id="2" name="Title 1">
-            <a:extLst>
-              <a:ext uri="{FF2B5EF4-FFF2-40B4-BE49-F238E27FC236}">
-                <a16:creationId xmlns:a16="http://schemas.microsoft.com/office/drawing/2014/main" id="{79253DB2-D4EC-CF9E-6389-80A927BAC9BE}"/>
-              </a:ext>
-            </a:extLst>
-          </p:cNvPr>
-          <p:cNvSpPr>
-            <a:spLocks noGrp="1"/>
-          </p:cNvSpPr>
-          <p:nvPr>
-            <p:ph type="title"/>
-          </p:nvPr>
-        </p:nvSpPr>
-        <p:spPr>
-          <a:xfrm>
-            <a:off x="433914" y="478525"/>
-            <a:ext cx="11328403" cy="315407"/>
-          </a:xfrm>
-        </p:spPr>
-        <p:txBody>
-          <a:bodyPr wrap="square" anchor="b">
-            <a:normAutofit/>
-          </a:bodyPr>
-          <a:lstStyle/>
-          <a:p>
-            <a:r>
-              <a:rPr lang="en-US" dirty="0"/>
-              <a:t>Swagger API</a:t>
-            </a:r>
-          </a:p>
-        </p:txBody>
-      </p:sp>
-      <p:sp>
-        <p:nvSpPr>
-          <p:cNvPr id="12" name="Text Placeholder 2">
-            <a:extLst>
-              <a:ext uri="{FF2B5EF4-FFF2-40B4-BE49-F238E27FC236}">
-                <a16:creationId xmlns:a16="http://schemas.microsoft.com/office/drawing/2014/main" id="{3F3799DC-43EB-3951-5B9B-E3AD07483F37}"/>
-              </a:ext>
-            </a:extLst>
-          </p:cNvPr>
-          <p:cNvSpPr>
-            <a:spLocks noGrp="1"/>
-          </p:cNvSpPr>
-          <p:nvPr>
-            <p:ph type="body" sz="quarter" idx="13"/>
-          </p:nvPr>
-        </p:nvSpPr>
-        <p:spPr>
-          <a:xfrm>
-            <a:off x="431999" y="6000001"/>
-            <a:ext cx="11329919" cy="192097"/>
-          </a:xfrm>
-        </p:spPr>
-        <p:txBody>
-          <a:bodyPr/>
-          <a:lstStyle/>
-          <a:p>
-            <a:endParaRPr lang="en-US"/>
-          </a:p>
-        </p:txBody>
-      </p:sp>
-      <p:pic>
-        <p:nvPicPr>
-          <p:cNvPr id="4" name="Picture 3" descr="A screenshot of a computer&#10;&#10;AI-generated content may be incorrect.">
-            <a:extLst>
-              <a:ext uri="{FF2B5EF4-FFF2-40B4-BE49-F238E27FC236}">
-                <a16:creationId xmlns:a16="http://schemas.microsoft.com/office/drawing/2014/main" id="{D318B62A-C04F-0B2C-1468-C28038A89210}"/>
-              </a:ext>
-            </a:extLst>
-          </p:cNvPr>
-          <p:cNvPicPr>
-            <a:picLocks noChangeAspect="1"/>
-          </p:cNvPicPr>
-          <p:nvPr/>
-        </p:nvPicPr>
-        <p:blipFill>
-          <a:blip r:embed="rId2">
-            <a:extLst>
-              <a:ext uri="{28A0092B-C50C-407E-A947-70E740481C1C}">
-                <a14:useLocalDpi xmlns:a14="http://schemas.microsoft.com/office/drawing/2010/main" val="0"/>
-              </a:ext>
-            </a:extLst>
-          </a:blip>
-          <a:srcRect r="29508"/>
-          <a:stretch>
-            <a:fillRect/>
-          </a:stretch>
-        </p:blipFill>
-        <p:spPr>
-          <a:xfrm>
-            <a:off x="6385917" y="1545873"/>
-            <a:ext cx="5376000" cy="4099200"/>
-          </a:xfrm>
-          <a:prstGeom prst="rect">
-            <a:avLst/>
-          </a:prstGeom>
-          <a:noFill/>
-        </p:spPr>
-      </p:pic>
-      <p:pic>
-        <p:nvPicPr>
-          <p:cNvPr id="7" name="Picture 6" descr="A screenshot of a computer&#10;&#10;AI-generated content may be incorrect.">
-            <a:extLst>
-              <a:ext uri="{FF2B5EF4-FFF2-40B4-BE49-F238E27FC236}">
-                <a16:creationId xmlns:a16="http://schemas.microsoft.com/office/drawing/2014/main" id="{1EE97E11-3F4B-226B-CEF5-E5936B5047D5}"/>
-              </a:ext>
-            </a:extLst>
-          </p:cNvPr>
-          <p:cNvPicPr>
-            <a:picLocks noChangeAspect="1"/>
-          </p:cNvPicPr>
-          <p:nvPr/>
-        </p:nvPicPr>
-        <p:blipFill>
-          <a:blip r:embed="rId3">
-            <a:extLst>
-              <a:ext uri="{28A0092B-C50C-407E-A947-70E740481C1C}">
-                <a14:useLocalDpi xmlns:a14="http://schemas.microsoft.com/office/drawing/2010/main" val="0"/>
-              </a:ext>
-            </a:extLst>
-          </a:blip>
-          <a:srcRect l="2473" r="22441"/>
-          <a:stretch>
-            <a:fillRect/>
-          </a:stretch>
-        </p:blipFill>
-        <p:spPr>
-          <a:xfrm>
-            <a:off x="431800" y="1535113"/>
-            <a:ext cx="5519738" cy="3951287"/>
-          </a:xfrm>
-          <a:prstGeom prst="rect">
-            <a:avLst/>
-          </a:prstGeom>
-          <a:noFill/>
-        </p:spPr>
-      </p:pic>
-    </p:spTree>
-    <p:extLst>
-      <p:ext uri="{BB962C8B-B14F-4D97-AF65-F5344CB8AC3E}">
-        <p14:creationId xmlns:p14="http://schemas.microsoft.com/office/powerpoint/2010/main" val="3902786273"/>
-      </p:ext>
-    </p:extLst>
-  </p:cSld>
-  <p:clrMapOvr>
-    <a:masterClrMapping/>
-  </p:clrMapOvr>
-</p:sld>
-</file>
-
-<file path=ppt/slides/slide11.xml><?xml version="1.0" encoding="utf-8"?>
-<p:sld xmlns:a="http://schemas.openxmlformats.org/drawingml/2006/main" xmlns:r="http://schemas.openxmlformats.org/officeDocument/2006/relationships" xmlns:p="http://schemas.openxmlformats.org/presentationml/2006/main">
-  <p:cSld>
-    <p:spTree>
-      <p:nvGrpSpPr>
-        <p:cNvPr id="1" name=""/>
-        <p:cNvGrpSpPr/>
-        <p:nvPr/>
-      </p:nvGrpSpPr>
-      <p:grpSpPr>
-        <a:xfrm>
-          <a:off x="0" y="0"/>
-          <a:ext cx="0" cy="0"/>
-          <a:chOff x="0" y="0"/>
-          <a:chExt cx="0" cy="0"/>
-        </a:xfrm>
-      </p:grpSpPr>
-      <p:sp>
-        <p:nvSpPr>
-          <p:cNvPr id="2" name="Title 1">
-            <a:extLst>
-              <a:ext uri="{FF2B5EF4-FFF2-40B4-BE49-F238E27FC236}">
-                <a16:creationId xmlns:a16="http://schemas.microsoft.com/office/drawing/2014/main" id="{AEC83BB0-8222-2CAF-0612-58E72144D4AB}"/>
-              </a:ext>
-            </a:extLst>
-          </p:cNvPr>
-          <p:cNvSpPr>
-            <a:spLocks noGrp="1"/>
-          </p:cNvSpPr>
-          <p:nvPr>
-            <p:ph type="title"/>
-          </p:nvPr>
-        </p:nvSpPr>
-        <p:spPr>
-          <a:xfrm>
-            <a:off x="432000" y="478525"/>
-            <a:ext cx="11328000" cy="315407"/>
-          </a:xfrm>
-        </p:spPr>
-        <p:txBody>
-          <a:bodyPr anchor="b">
-            <a:normAutofit/>
-          </a:bodyPr>
-          <a:lstStyle/>
-          <a:p>
-            <a:r>
-              <a:rPr lang="en-US" dirty="0"/>
-              <a:t>Mongo Db</a:t>
-            </a:r>
-          </a:p>
-        </p:txBody>
-      </p:sp>
-      <p:sp>
-        <p:nvSpPr>
-          <p:cNvPr id="6" name="Text Placeholder 2">
-            <a:extLst>
-              <a:ext uri="{FF2B5EF4-FFF2-40B4-BE49-F238E27FC236}">
-                <a16:creationId xmlns:a16="http://schemas.microsoft.com/office/drawing/2014/main" id="{33BC3F3B-E9EF-2336-529A-7BBFC2189822}"/>
-              </a:ext>
-            </a:extLst>
-          </p:cNvPr>
-          <p:cNvSpPr>
-            <a:spLocks noGrp="1"/>
-          </p:cNvSpPr>
-          <p:nvPr>
-            <p:ph type="body" sz="quarter" idx="13"/>
-          </p:nvPr>
-        </p:nvSpPr>
-        <p:spPr>
-          <a:xfrm>
-            <a:off x="432000" y="6000001"/>
-            <a:ext cx="11328000" cy="192097"/>
-          </a:xfrm>
-        </p:spPr>
-        <p:txBody>
-          <a:bodyPr/>
-          <a:lstStyle/>
-          <a:p>
-            <a:endParaRPr lang="en-US"/>
-          </a:p>
-        </p:txBody>
-      </p:sp>
-      <p:pic>
-        <p:nvPicPr>
-          <p:cNvPr id="4" name="Picture 3" descr="A screenshot of a computer&#10;&#10;AI-generated content may be incorrect.">
-            <a:extLst>
-              <a:ext uri="{FF2B5EF4-FFF2-40B4-BE49-F238E27FC236}">
-                <a16:creationId xmlns:a16="http://schemas.microsoft.com/office/drawing/2014/main" id="{0E5AF741-5D74-C76A-43C4-39EC1076C45B}"/>
-              </a:ext>
-            </a:extLst>
-          </p:cNvPr>
-          <p:cNvPicPr>
-            <a:picLocks noChangeAspect="1"/>
-          </p:cNvPicPr>
-          <p:nvPr/>
-        </p:nvPicPr>
-        <p:blipFill>
-          <a:blip r:embed="rId2">
-            <a:extLst>
-              <a:ext uri="{28A0092B-C50C-407E-A947-70E740481C1C}">
-                <a14:useLocalDpi xmlns:a14="http://schemas.microsoft.com/office/drawing/2010/main" val="0"/>
-              </a:ext>
-            </a:extLst>
-          </a:blip>
-          <a:stretch>
-            <a:fillRect/>
-          </a:stretch>
-        </p:blipFill>
-        <p:spPr>
-          <a:xfrm>
-            <a:off x="2420384" y="1535113"/>
-            <a:ext cx="7351231" cy="3951287"/>
-          </a:xfrm>
-          <a:prstGeom prst="rect">
-            <a:avLst/>
-          </a:prstGeom>
-          <a:noFill/>
-        </p:spPr>
-      </p:pic>
-    </p:spTree>
-    <p:extLst>
-      <p:ext uri="{BB962C8B-B14F-4D97-AF65-F5344CB8AC3E}">
-        <p14:creationId xmlns:p14="http://schemas.microsoft.com/office/powerpoint/2010/main" val="2247211990"/>
-      </p:ext>
-    </p:extLst>
-  </p:cSld>
-  <p:clrMapOvr>
-    <a:masterClrMapping/>
-  </p:clrMapOvr>
-</p:sld>
-</file>
-
-<file path=ppt/slides/slide12.xml><?xml version="1.0" encoding="utf-8"?>
 <p:sld xmlns:a="http://schemas.openxmlformats.org/drawingml/2006/main" xmlns:r="http://schemas.openxmlformats.org/officeDocument/2006/relationships" xmlns:p="http://schemas.openxmlformats.org/presentationml/2006/main">
   <p:cSld>
     <p:spTree>
@@ -22711,6 +22408,270 @@
 </p:sld>
 </file>
 
+<file path=ppt/slides/slide11.xml><?xml version="1.0" encoding="utf-8"?>
+<p:sld xmlns:a="http://schemas.openxmlformats.org/drawingml/2006/main" xmlns:r="http://schemas.openxmlformats.org/officeDocument/2006/relationships" xmlns:p="http://schemas.openxmlformats.org/presentationml/2006/main">
+  <p:cSld>
+    <p:spTree>
+      <p:nvGrpSpPr>
+        <p:cNvPr id="1" name=""/>
+        <p:cNvGrpSpPr/>
+        <p:nvPr/>
+      </p:nvGrpSpPr>
+      <p:grpSpPr>
+        <a:xfrm>
+          <a:off x="0" y="0"/>
+          <a:ext cx="0" cy="0"/>
+          <a:chOff x="0" y="0"/>
+          <a:chExt cx="0" cy="0"/>
+        </a:xfrm>
+      </p:grpSpPr>
+      <p:sp>
+        <p:nvSpPr>
+          <p:cNvPr id="4" name="Title 1">
+            <a:extLst>
+              <a:ext uri="{FF2B5EF4-FFF2-40B4-BE49-F238E27FC236}">
+                <a16:creationId xmlns:a16="http://schemas.microsoft.com/office/drawing/2014/main" id="{3FEA1D7B-DD5A-8515-8C77-2A3294B2EF7E}"/>
+              </a:ext>
+            </a:extLst>
+          </p:cNvPr>
+          <p:cNvSpPr>
+            <a:spLocks noGrp="1"/>
+          </p:cNvSpPr>
+          <p:nvPr>
+            <p:ph type="title"/>
+          </p:nvPr>
+        </p:nvSpPr>
+        <p:spPr>
+          <a:xfrm>
+            <a:off x="432000" y="478525"/>
+            <a:ext cx="11328000" cy="315407"/>
+          </a:xfrm>
+        </p:spPr>
+        <p:txBody>
+          <a:bodyPr anchor="b">
+            <a:normAutofit/>
+          </a:bodyPr>
+          <a:lstStyle/>
+          <a:p>
+            <a:r>
+              <a:rPr lang="en-US" dirty="0"/>
+              <a:t>Database schema</a:t>
+            </a:r>
+          </a:p>
+        </p:txBody>
+      </p:sp>
+      <p:sp>
+        <p:nvSpPr>
+          <p:cNvPr id="12" name="Text Placeholder 2">
+            <a:extLst>
+              <a:ext uri="{FF2B5EF4-FFF2-40B4-BE49-F238E27FC236}">
+                <a16:creationId xmlns:a16="http://schemas.microsoft.com/office/drawing/2014/main" id="{81A44827-DCB9-18D1-64BF-4D165EB28B29}"/>
+              </a:ext>
+            </a:extLst>
+          </p:cNvPr>
+          <p:cNvSpPr>
+            <a:spLocks noGrp="1"/>
+          </p:cNvSpPr>
+          <p:nvPr>
+            <p:ph type="body" sz="quarter" idx="13"/>
+          </p:nvPr>
+        </p:nvSpPr>
+        <p:spPr>
+          <a:xfrm>
+            <a:off x="432000" y="6000001"/>
+            <a:ext cx="11328000" cy="192097"/>
+          </a:xfrm>
+        </p:spPr>
+        <p:txBody>
+          <a:bodyPr/>
+          <a:lstStyle/>
+          <a:p>
+            <a:endParaRPr lang="en-US"/>
+          </a:p>
+        </p:txBody>
+      </p:sp>
+      <p:pic>
+        <p:nvPicPr>
+          <p:cNvPr id="7" name="Picture 6" descr="A screenshot of a computer&#10;&#10;AI-generated content may be incorrect.">
+            <a:extLst>
+              <a:ext uri="{FF2B5EF4-FFF2-40B4-BE49-F238E27FC236}">
+                <a16:creationId xmlns:a16="http://schemas.microsoft.com/office/drawing/2014/main" id="{00D514F6-9507-86C3-9550-89271438B9FE}"/>
+              </a:ext>
+            </a:extLst>
+          </p:cNvPr>
+          <p:cNvPicPr>
+            <a:picLocks noChangeAspect="1"/>
+          </p:cNvPicPr>
+          <p:nvPr/>
+        </p:nvPicPr>
+        <p:blipFill>
+          <a:blip r:embed="rId2">
+            <a:extLst>
+              <a:ext uri="{28A0092B-C50C-407E-A947-70E740481C1C}">
+                <a14:useLocalDpi xmlns:a14="http://schemas.microsoft.com/office/drawing/2010/main" val="0"/>
+              </a:ext>
+            </a:extLst>
+          </a:blip>
+          <a:stretch>
+            <a:fillRect/>
+          </a:stretch>
+        </p:blipFill>
+        <p:spPr>
+          <a:xfrm>
+            <a:off x="3169121" y="1535113"/>
+            <a:ext cx="5853758" cy="3951287"/>
+          </a:xfrm>
+          <a:prstGeom prst="rect">
+            <a:avLst/>
+          </a:prstGeom>
+          <a:noFill/>
+        </p:spPr>
+      </p:pic>
+    </p:spTree>
+    <p:extLst>
+      <p:ext uri="{BB962C8B-B14F-4D97-AF65-F5344CB8AC3E}">
+        <p14:creationId xmlns:p14="http://schemas.microsoft.com/office/powerpoint/2010/main" val="1785703018"/>
+      </p:ext>
+    </p:extLst>
+  </p:cSld>
+  <p:clrMapOvr>
+    <a:masterClrMapping/>
+  </p:clrMapOvr>
+</p:sld>
+</file>
+
+<file path=ppt/slides/slide12.xml><?xml version="1.0" encoding="utf-8"?>
+<p:sld xmlns:a="http://schemas.openxmlformats.org/drawingml/2006/main" xmlns:r="http://schemas.openxmlformats.org/officeDocument/2006/relationships" xmlns:p="http://schemas.openxmlformats.org/presentationml/2006/main">
+  <p:cSld>
+    <p:spTree>
+      <p:nvGrpSpPr>
+        <p:cNvPr id="1" name=""/>
+        <p:cNvGrpSpPr/>
+        <p:nvPr/>
+      </p:nvGrpSpPr>
+      <p:grpSpPr>
+        <a:xfrm>
+          <a:off x="0" y="0"/>
+          <a:ext cx="0" cy="0"/>
+          <a:chOff x="0" y="0"/>
+          <a:chExt cx="0" cy="0"/>
+        </a:xfrm>
+      </p:grpSpPr>
+      <p:sp>
+        <p:nvSpPr>
+          <p:cNvPr id="2" name="Title 1">
+            <a:extLst>
+              <a:ext uri="{FF2B5EF4-FFF2-40B4-BE49-F238E27FC236}">
+                <a16:creationId xmlns:a16="http://schemas.microsoft.com/office/drawing/2014/main" id="{AEC83BB0-8222-2CAF-0612-58E72144D4AB}"/>
+              </a:ext>
+            </a:extLst>
+          </p:cNvPr>
+          <p:cNvSpPr>
+            <a:spLocks noGrp="1"/>
+          </p:cNvSpPr>
+          <p:nvPr>
+            <p:ph type="title"/>
+          </p:nvPr>
+        </p:nvSpPr>
+        <p:spPr>
+          <a:xfrm>
+            <a:off x="432000" y="478525"/>
+            <a:ext cx="11328000" cy="315407"/>
+          </a:xfrm>
+        </p:spPr>
+        <p:txBody>
+          <a:bodyPr anchor="b">
+            <a:normAutofit/>
+          </a:bodyPr>
+          <a:lstStyle/>
+          <a:p>
+            <a:r>
+              <a:rPr lang="en-US" dirty="0"/>
+              <a:t>Mongo Db</a:t>
+            </a:r>
+          </a:p>
+        </p:txBody>
+      </p:sp>
+      <p:sp>
+        <p:nvSpPr>
+          <p:cNvPr id="6" name="Text Placeholder 2">
+            <a:extLst>
+              <a:ext uri="{FF2B5EF4-FFF2-40B4-BE49-F238E27FC236}">
+                <a16:creationId xmlns:a16="http://schemas.microsoft.com/office/drawing/2014/main" id="{33BC3F3B-E9EF-2336-529A-7BBFC2189822}"/>
+              </a:ext>
+            </a:extLst>
+          </p:cNvPr>
+          <p:cNvSpPr>
+            <a:spLocks noGrp="1"/>
+          </p:cNvSpPr>
+          <p:nvPr>
+            <p:ph type="body" sz="quarter" idx="13"/>
+          </p:nvPr>
+        </p:nvSpPr>
+        <p:spPr>
+          <a:xfrm>
+            <a:off x="432000" y="6000001"/>
+            <a:ext cx="11328000" cy="192097"/>
+          </a:xfrm>
+        </p:spPr>
+        <p:txBody>
+          <a:bodyPr/>
+          <a:lstStyle/>
+          <a:p>
+            <a:endParaRPr lang="en-US"/>
+          </a:p>
+        </p:txBody>
+      </p:sp>
+      <p:pic>
+        <p:nvPicPr>
+          <p:cNvPr id="4" name="Picture 3" descr="A screenshot of a computer&#10;&#10;AI-generated content may be incorrect.">
+            <a:extLst>
+              <a:ext uri="{FF2B5EF4-FFF2-40B4-BE49-F238E27FC236}">
+                <a16:creationId xmlns:a16="http://schemas.microsoft.com/office/drawing/2014/main" id="{0E5AF741-5D74-C76A-43C4-39EC1076C45B}"/>
+              </a:ext>
+            </a:extLst>
+          </p:cNvPr>
+          <p:cNvPicPr>
+            <a:picLocks noChangeAspect="1"/>
+          </p:cNvPicPr>
+          <p:nvPr/>
+        </p:nvPicPr>
+        <p:blipFill>
+          <a:blip r:embed="rId2">
+            <a:extLst>
+              <a:ext uri="{28A0092B-C50C-407E-A947-70E740481C1C}">
+                <a14:useLocalDpi xmlns:a14="http://schemas.microsoft.com/office/drawing/2010/main" val="0"/>
+              </a:ext>
+            </a:extLst>
+          </a:blip>
+          <a:stretch>
+            <a:fillRect/>
+          </a:stretch>
+        </p:blipFill>
+        <p:spPr>
+          <a:xfrm>
+            <a:off x="2420384" y="1535113"/>
+            <a:ext cx="7351231" cy="3951287"/>
+          </a:xfrm>
+          <a:prstGeom prst="rect">
+            <a:avLst/>
+          </a:prstGeom>
+          <a:noFill/>
+        </p:spPr>
+      </p:pic>
+    </p:spTree>
+    <p:extLst>
+      <p:ext uri="{BB962C8B-B14F-4D97-AF65-F5344CB8AC3E}">
+        <p14:creationId xmlns:p14="http://schemas.microsoft.com/office/powerpoint/2010/main" val="2247211990"/>
+      </p:ext>
+    </p:extLst>
+  </p:cSld>
+  <p:clrMapOvr>
+    <a:masterClrMapping/>
+  </p:clrMapOvr>
+</p:sld>
+</file>
+
 <file path=ppt/slides/slide13.xml><?xml version="1.0" encoding="utf-8"?>
 <p:sld xmlns:a="http://schemas.openxmlformats.org/drawingml/2006/main" xmlns:r="http://schemas.openxmlformats.org/officeDocument/2006/relationships" xmlns:p="http://schemas.openxmlformats.org/presentationml/2006/main">
   <p:cSld>
@@ -22733,242 +22694,7 @@
           <p:cNvPr id="2" name="Title 1">
             <a:extLst>
               <a:ext uri="{FF2B5EF4-FFF2-40B4-BE49-F238E27FC236}">
-                <a16:creationId xmlns:a16="http://schemas.microsoft.com/office/drawing/2014/main" id="{2C3EFD84-E4A6-7CA8-04C7-0592F855334E}"/>
-              </a:ext>
-            </a:extLst>
-          </p:cNvPr>
-          <p:cNvSpPr txBox="1">
-            <a:spLocks/>
-          </p:cNvSpPr>
-          <p:nvPr/>
-        </p:nvSpPr>
-        <p:spPr>
-          <a:xfrm>
-            <a:off x="317700" y="278954"/>
-            <a:ext cx="11328000" cy="567591"/>
-          </a:xfrm>
-          <a:prstGeom prst="rect">
-            <a:avLst/>
-          </a:prstGeom>
-        </p:spPr>
-        <p:txBody>
-          <a:bodyPr/>
-          <a:lstStyle>
-            <a:lvl1pPr algn="l" defTabSz="1219170" rtl="0" eaLnBrk="1" fontAlgn="base" latinLnBrk="0" hangingPunct="1">
-              <a:lnSpc>
-                <a:spcPct val="75000"/>
-              </a:lnSpc>
-              <a:spcBef>
-                <a:spcPct val="0"/>
-              </a:spcBef>
-              <a:spcAft>
-                <a:spcPct val="0"/>
-              </a:spcAft>
-              <a:buNone/>
-              <a:defRPr lang="fr-FR" sz="2667" b="0" kern="1200" cap="all" baseline="0" noProof="0" dirty="0">
-                <a:solidFill>
-                  <a:schemeClr val="bg2"/>
-                </a:solidFill>
-                <a:latin typeface="+mj-lt"/>
-                <a:ea typeface="+mj-ea"/>
-                <a:cs typeface="Arial" pitchFamily="34" charset="0"/>
-              </a:defRPr>
-            </a:lvl1pPr>
-          </a:lstStyle>
-          <a:p>
-            <a:r>
-              <a:rPr lang="en-US" sz="3200" u="sng" dirty="0"/>
-              <a:t>UI snapshots</a:t>
-            </a:r>
-          </a:p>
-        </p:txBody>
-      </p:sp>
-      <p:pic>
-        <p:nvPicPr>
-          <p:cNvPr id="3" name="Picture 2">
-            <a:extLst>
-              <a:ext uri="{FF2B5EF4-FFF2-40B4-BE49-F238E27FC236}">
-                <a16:creationId xmlns:a16="http://schemas.microsoft.com/office/drawing/2014/main" id="{B3DFFC85-13E2-6811-D907-D8CF716FF1E1}"/>
-              </a:ext>
-            </a:extLst>
-          </p:cNvPr>
-          <p:cNvPicPr>
-            <a:picLocks noChangeAspect="1"/>
-          </p:cNvPicPr>
-          <p:nvPr/>
-        </p:nvPicPr>
-        <p:blipFill>
-          <a:blip r:embed="rId2"/>
-          <a:stretch>
-            <a:fillRect/>
-          </a:stretch>
-        </p:blipFill>
-        <p:spPr>
-          <a:xfrm>
-            <a:off x="852352" y="4135107"/>
-            <a:ext cx="3319411" cy="1950154"/>
-          </a:xfrm>
-          <a:prstGeom prst="rect">
-            <a:avLst/>
-          </a:prstGeom>
-        </p:spPr>
-      </p:pic>
-      <p:pic>
-        <p:nvPicPr>
-          <p:cNvPr id="6" name="Picture 5">
-            <a:extLst>
-              <a:ext uri="{FF2B5EF4-FFF2-40B4-BE49-F238E27FC236}">
-                <a16:creationId xmlns:a16="http://schemas.microsoft.com/office/drawing/2014/main" id="{4C736B58-F8F4-55E8-0502-840C21993539}"/>
-              </a:ext>
-            </a:extLst>
-          </p:cNvPr>
-          <p:cNvPicPr>
-            <a:picLocks noChangeAspect="1"/>
-          </p:cNvPicPr>
-          <p:nvPr/>
-        </p:nvPicPr>
-        <p:blipFill>
-          <a:blip r:embed="rId3"/>
-          <a:stretch>
-            <a:fillRect/>
-          </a:stretch>
-        </p:blipFill>
-        <p:spPr>
-          <a:xfrm>
-            <a:off x="4505740" y="4135107"/>
-            <a:ext cx="3451253" cy="2027611"/>
-          </a:xfrm>
-          <a:prstGeom prst="rect">
-            <a:avLst/>
-          </a:prstGeom>
-        </p:spPr>
-      </p:pic>
-      <p:pic>
-        <p:nvPicPr>
-          <p:cNvPr id="7" name="Picture 6">
-            <a:extLst>
-              <a:ext uri="{FF2B5EF4-FFF2-40B4-BE49-F238E27FC236}">
-                <a16:creationId xmlns:a16="http://schemas.microsoft.com/office/drawing/2014/main" id="{F3193508-B472-59A6-5639-F2EA99D5B5F8}"/>
-              </a:ext>
-            </a:extLst>
-          </p:cNvPr>
-          <p:cNvPicPr>
-            <a:picLocks noChangeAspect="1"/>
-          </p:cNvPicPr>
-          <p:nvPr/>
-        </p:nvPicPr>
-        <p:blipFill>
-          <a:blip r:embed="rId4"/>
-          <a:stretch>
-            <a:fillRect/>
-          </a:stretch>
-        </p:blipFill>
-        <p:spPr>
-          <a:xfrm>
-            <a:off x="584741" y="1119439"/>
-            <a:ext cx="4767485" cy="2804403"/>
-          </a:xfrm>
-          <a:prstGeom prst="rect">
-            <a:avLst/>
-          </a:prstGeom>
-        </p:spPr>
-      </p:pic>
-      <p:pic>
-        <p:nvPicPr>
-          <p:cNvPr id="8" name="Picture 7">
-            <a:extLst>
-              <a:ext uri="{FF2B5EF4-FFF2-40B4-BE49-F238E27FC236}">
-                <a16:creationId xmlns:a16="http://schemas.microsoft.com/office/drawing/2014/main" id="{0A04EB4E-28F8-4CFC-CD97-2765D217D690}"/>
-              </a:ext>
-            </a:extLst>
-          </p:cNvPr>
-          <p:cNvPicPr>
-            <a:picLocks noChangeAspect="1"/>
-          </p:cNvPicPr>
-          <p:nvPr/>
-        </p:nvPicPr>
-        <p:blipFill>
-          <a:blip r:embed="rId5"/>
-          <a:stretch>
-            <a:fillRect/>
-          </a:stretch>
-        </p:blipFill>
-        <p:spPr>
-          <a:xfrm>
-            <a:off x="5827271" y="510139"/>
-            <a:ext cx="5818429" cy="3413703"/>
-          </a:xfrm>
-          <a:prstGeom prst="rect">
-            <a:avLst/>
-          </a:prstGeom>
-        </p:spPr>
-      </p:pic>
-      <p:pic>
-        <p:nvPicPr>
-          <p:cNvPr id="9" name="Picture 8">
-            <a:extLst>
-              <a:ext uri="{FF2B5EF4-FFF2-40B4-BE49-F238E27FC236}">
-                <a16:creationId xmlns:a16="http://schemas.microsoft.com/office/drawing/2014/main" id="{BA85755C-5ABB-4636-8D35-C13DE285FEAB}"/>
-              </a:ext>
-            </a:extLst>
-          </p:cNvPr>
-          <p:cNvPicPr>
-            <a:picLocks noChangeAspect="1"/>
-          </p:cNvPicPr>
-          <p:nvPr/>
-        </p:nvPicPr>
-        <p:blipFill>
-          <a:blip r:embed="rId6"/>
-          <a:stretch>
-            <a:fillRect/>
-          </a:stretch>
-        </p:blipFill>
-        <p:spPr>
-          <a:xfrm>
-            <a:off x="8515965" y="4133789"/>
-            <a:ext cx="3451254" cy="2028929"/>
-          </a:xfrm>
-          <a:prstGeom prst="rect">
-            <a:avLst/>
-          </a:prstGeom>
-        </p:spPr>
-      </p:pic>
-    </p:spTree>
-    <p:extLst>
-      <p:ext uri="{BB962C8B-B14F-4D97-AF65-F5344CB8AC3E}">
-        <p14:creationId xmlns:p14="http://schemas.microsoft.com/office/powerpoint/2010/main" val="2726914751"/>
-      </p:ext>
-    </p:extLst>
-  </p:cSld>
-  <p:clrMapOvr>
-    <a:masterClrMapping/>
-  </p:clrMapOvr>
-</p:sld>
-</file>
-
-<file path=ppt/slides/slide14.xml><?xml version="1.0" encoding="utf-8"?>
-<p:sld xmlns:a="http://schemas.openxmlformats.org/drawingml/2006/main" xmlns:r="http://schemas.openxmlformats.org/officeDocument/2006/relationships" xmlns:p="http://schemas.openxmlformats.org/presentationml/2006/main">
-  <p:cSld>
-    <p:spTree>
-      <p:nvGrpSpPr>
-        <p:cNvPr id="1" name=""/>
-        <p:cNvGrpSpPr/>
-        <p:nvPr/>
-      </p:nvGrpSpPr>
-      <p:grpSpPr>
-        <a:xfrm>
-          <a:off x="0" y="0"/>
-          <a:ext cx="0" cy="0"/>
-          <a:chOff x="0" y="0"/>
-          <a:chExt cx="0" cy="0"/>
-        </a:xfrm>
-      </p:grpSpPr>
-      <p:sp>
-        <p:nvSpPr>
-          <p:cNvPr id="2" name="Title 1">
-            <a:extLst>
-              <a:ext uri="{FF2B5EF4-FFF2-40B4-BE49-F238E27FC236}">
-                <a16:creationId xmlns:a16="http://schemas.microsoft.com/office/drawing/2014/main" id="{2C3EFD84-E4A6-7CA8-04C7-0592F855334E}"/>
+                <a16:creationId xmlns:a16="http://schemas.microsoft.com/office/drawing/2014/main" id="{42EB3A37-DC80-EBBA-D68E-55471ACA9026}"/>
               </a:ext>
             </a:extLst>
           </p:cNvPr>
@@ -23024,38 +22750,17 @@
                 <a:ea typeface="+mj-ea"/>
                 <a:cs typeface="Arial" pitchFamily="34" charset="0"/>
               </a:rPr>
-              <a:t>Npm package (</a:t>
+              <a:t>model</a:t>
             </a:r>
-            <a:r>
-              <a:rPr lang="en-IN" dirty="0">
-                <a:hlinkClick r:id="rId2"/>
-              </a:rPr>
-              <a:t>@sgbots/data-anonymiser – </a:t>
-            </a:r>
-            <a:r>
-              <a:rPr lang="en-IN" dirty="0" err="1">
-                <a:hlinkClick r:id="rId2"/>
-              </a:rPr>
-              <a:t>npm</a:t>
-            </a:r>
-            <a:r>
-              <a:rPr lang="en-IN" dirty="0"/>
-              <a:t>)</a:t>
-            </a:r>
-            <a:endParaRPr lang="en-US" b="0" kern="1200" cap="all" baseline="0" noProof="0" dirty="0">
-              <a:latin typeface="+mj-lt"/>
-              <a:ea typeface="+mj-ea"/>
-              <a:cs typeface="Arial" pitchFamily="34" charset="0"/>
-            </a:endParaRPr>
           </a:p>
         </p:txBody>
       </p:sp>
       <p:sp>
         <p:nvSpPr>
-          <p:cNvPr id="10" name="Text Placeholder 2">
+          <p:cNvPr id="9" name="Text Placeholder 2">
             <a:extLst>
               <a:ext uri="{FF2B5EF4-FFF2-40B4-BE49-F238E27FC236}">
-                <a16:creationId xmlns:a16="http://schemas.microsoft.com/office/drawing/2014/main" id="{03D0DDA7-2289-0CD8-3A08-520458727FC5}"/>
+                <a16:creationId xmlns:a16="http://schemas.microsoft.com/office/drawing/2014/main" id="{491E5982-AC8C-F304-4C80-0BB1810F5E65}"/>
               </a:ext>
             </a:extLst>
           </p:cNvPr>
@@ -23082,10 +22787,10 @@
       </p:sp>
       <p:pic>
         <p:nvPicPr>
-          <p:cNvPr id="5" name="Picture 4">
+          <p:cNvPr id="4" name="Picture 3" descr="A diagram of different types of pills&#10;&#10;AI-generated content may be incorrect.">
             <a:extLst>
               <a:ext uri="{FF2B5EF4-FFF2-40B4-BE49-F238E27FC236}">
-                <a16:creationId xmlns:a16="http://schemas.microsoft.com/office/drawing/2014/main" id="{1D2AF117-000B-7873-F7A4-908497C4E4E2}"/>
+                <a16:creationId xmlns:a16="http://schemas.microsoft.com/office/drawing/2014/main" id="{550AF86D-4DF9-4BCC-9DF3-64C53C3D3E86}"/>
               </a:ext>
             </a:extLst>
           </p:cNvPr>
@@ -23095,15 +22800,21 @@
           <p:nvPr/>
         </p:nvPicPr>
         <p:blipFill>
-          <a:blip r:embed="rId3"/>
+          <a:blip r:embed="rId2">
+            <a:extLst>
+              <a:ext uri="{28A0092B-C50C-407E-A947-70E740481C1C}">
+                <a14:useLocalDpi xmlns:a14="http://schemas.microsoft.com/office/drawing/2010/main" val="0"/>
+              </a:ext>
+            </a:extLst>
+          </a:blip>
           <a:stretch>
             <a:fillRect/>
           </a:stretch>
         </p:blipFill>
         <p:spPr>
           <a:xfrm>
-            <a:off x="2733202" y="1535113"/>
-            <a:ext cx="6725596" cy="3951287"/>
+            <a:off x="2704338" y="1535113"/>
+            <a:ext cx="6783324" cy="3951287"/>
           </a:xfrm>
           <a:prstGeom prst="rect">
             <a:avLst/>
@@ -23114,7 +22825,231 @@
     </p:spTree>
     <p:extLst>
       <p:ext uri="{BB962C8B-B14F-4D97-AF65-F5344CB8AC3E}">
-        <p14:creationId xmlns:p14="http://schemas.microsoft.com/office/powerpoint/2010/main" val="3442851545"/>
+        <p14:creationId xmlns:p14="http://schemas.microsoft.com/office/powerpoint/2010/main" val="2232843083"/>
+      </p:ext>
+    </p:extLst>
+  </p:cSld>
+  <p:clrMapOvr>
+    <a:masterClrMapping/>
+  </p:clrMapOvr>
+</p:sld>
+</file>
+
+<file path=ppt/slides/slide14.xml><?xml version="1.0" encoding="utf-8"?>
+<p:sld xmlns:a="http://schemas.openxmlformats.org/drawingml/2006/main" xmlns:r="http://schemas.openxmlformats.org/officeDocument/2006/relationships" xmlns:p="http://schemas.openxmlformats.org/presentationml/2006/main">
+  <p:cSld>
+    <p:spTree>
+      <p:nvGrpSpPr>
+        <p:cNvPr id="1" name=""/>
+        <p:cNvGrpSpPr/>
+        <p:nvPr/>
+      </p:nvGrpSpPr>
+      <p:grpSpPr>
+        <a:xfrm>
+          <a:off x="0" y="0"/>
+          <a:ext cx="0" cy="0"/>
+          <a:chOff x="0" y="0"/>
+          <a:chExt cx="0" cy="0"/>
+        </a:xfrm>
+      </p:grpSpPr>
+      <p:sp>
+        <p:nvSpPr>
+          <p:cNvPr id="2" name="Title 1">
+            <a:extLst>
+              <a:ext uri="{FF2B5EF4-FFF2-40B4-BE49-F238E27FC236}">
+                <a16:creationId xmlns:a16="http://schemas.microsoft.com/office/drawing/2014/main" id="{3F1BD324-3938-2C4E-21C8-9B9FC5FB805D}"/>
+              </a:ext>
+            </a:extLst>
+          </p:cNvPr>
+          <p:cNvSpPr>
+            <a:spLocks noGrp="1"/>
+          </p:cNvSpPr>
+          <p:nvPr>
+            <p:ph type="title"/>
+          </p:nvPr>
+        </p:nvSpPr>
+        <p:spPr>
+          <a:xfrm>
+            <a:off x="433915" y="478525"/>
+            <a:ext cx="7437967" cy="315407"/>
+          </a:xfrm>
+        </p:spPr>
+        <p:txBody>
+          <a:bodyPr wrap="square" anchor="b">
+            <a:normAutofit/>
+          </a:bodyPr>
+          <a:lstStyle/>
+          <a:p>
+            <a:r>
+              <a:rPr lang="en-US" dirty="0"/>
+              <a:t>TEST RESULTS</a:t>
+            </a:r>
+          </a:p>
+        </p:txBody>
+      </p:sp>
+      <p:sp>
+        <p:nvSpPr>
+          <p:cNvPr id="14" name="Text Placeholder 2">
+            <a:extLst>
+              <a:ext uri="{FF2B5EF4-FFF2-40B4-BE49-F238E27FC236}">
+                <a16:creationId xmlns:a16="http://schemas.microsoft.com/office/drawing/2014/main" id="{377F1C19-1000-3F80-18D0-C53E68129FB2}"/>
+              </a:ext>
+            </a:extLst>
+          </p:cNvPr>
+          <p:cNvSpPr>
+            <a:spLocks noGrp="1"/>
+          </p:cNvSpPr>
+          <p:nvPr>
+            <p:ph type="body" sz="quarter" idx="13"/>
+          </p:nvPr>
+        </p:nvSpPr>
+        <p:spPr>
+          <a:xfrm>
+            <a:off x="432000" y="6000001"/>
+            <a:ext cx="7439881" cy="192097"/>
+          </a:xfrm>
+        </p:spPr>
+        <p:txBody>
+          <a:bodyPr/>
+          <a:lstStyle/>
+          <a:p>
+            <a:endParaRPr lang="en-US"/>
+          </a:p>
+        </p:txBody>
+      </p:sp>
+      <p:sp>
+        <p:nvSpPr>
+          <p:cNvPr id="8" name="Content Placeholder 2">
+            <a:extLst>
+              <a:ext uri="{FF2B5EF4-FFF2-40B4-BE49-F238E27FC236}">
+                <a16:creationId xmlns:a16="http://schemas.microsoft.com/office/drawing/2014/main" id="{BFB31D85-76C1-BAC8-B9D3-5A518A59FB27}"/>
+              </a:ext>
+            </a:extLst>
+          </p:cNvPr>
+          <p:cNvSpPr>
+            <a:spLocks noGrp="1"/>
+          </p:cNvSpPr>
+          <p:nvPr>
+            <p:ph type="body" sz="quarter" idx="15"/>
+          </p:nvPr>
+        </p:nvSpPr>
+        <p:spPr>
+          <a:xfrm>
+            <a:off x="431800" y="1534584"/>
+            <a:ext cx="7440613" cy="3951287"/>
+          </a:xfrm>
+        </p:spPr>
+        <p:txBody>
+          <a:bodyPr vert="horz" lIns="0" tIns="0" rIns="0" bIns="0" rtlCol="0">
+            <a:normAutofit/>
+          </a:bodyPr>
+          <a:lstStyle/>
+          <a:p>
+            <a:pPr marL="342900" indent="-342900">
+              <a:buFont typeface="Wingdings" panose="05000000000000000000" pitchFamily="2" charset="2"/>
+              <a:buChar char="Ø"/>
+            </a:pPr>
+            <a:r>
+              <a:rPr lang="en-US" dirty="0"/>
+              <a:t>True Positive (TP): 540 (26.25%)</a:t>
+            </a:r>
+          </a:p>
+          <a:p>
+            <a:pPr marL="342900" indent="-342900">
+              <a:buFont typeface="Wingdings" panose="05000000000000000000" pitchFamily="2" charset="2"/>
+              <a:buChar char="Ø"/>
+            </a:pPr>
+            <a:r>
+              <a:rPr lang="en-US" dirty="0"/>
+              <a:t>True Negative (TN): 1350 (65.6%)</a:t>
+            </a:r>
+          </a:p>
+          <a:p>
+            <a:pPr marL="342900" indent="-342900">
+              <a:buFont typeface="Wingdings" panose="05000000000000000000" pitchFamily="2" charset="2"/>
+              <a:buChar char="Ø"/>
+            </a:pPr>
+            <a:r>
+              <a:rPr lang="en-US" dirty="0"/>
+              <a:t>False Positive (FP): 86 (4.18%)</a:t>
+            </a:r>
+          </a:p>
+          <a:p>
+            <a:pPr marL="342900" indent="-342900">
+              <a:buFont typeface="Wingdings" panose="05000000000000000000" pitchFamily="2" charset="2"/>
+              <a:buChar char="Ø"/>
+            </a:pPr>
+            <a:r>
+              <a:rPr lang="en-US" dirty="0"/>
+              <a:t>False Negative (FN): 82 (3.98%)</a:t>
+            </a:r>
+          </a:p>
+          <a:p>
+            <a:pPr marL="342900" indent="-342900">
+              <a:buFont typeface="Wingdings" panose="05000000000000000000" pitchFamily="2" charset="2"/>
+              <a:buChar char="Ø"/>
+            </a:pPr>
+            <a:endParaRPr lang="en-US" dirty="0"/>
+          </a:p>
+          <a:p>
+            <a:pPr marL="342900" indent="-342900">
+              <a:buFont typeface="Wingdings" panose="05000000000000000000" pitchFamily="2" charset="2"/>
+              <a:buChar char="Ø"/>
+            </a:pPr>
+            <a:r>
+              <a:rPr lang="en-US" dirty="0"/>
+              <a:t>Accuracy: 91.7%</a:t>
+            </a:r>
+          </a:p>
+          <a:p>
+            <a:pPr marL="342900" indent="-342900">
+              <a:buFont typeface="Wingdings" panose="05000000000000000000" pitchFamily="2" charset="2"/>
+              <a:buChar char="Ø"/>
+            </a:pPr>
+            <a:r>
+              <a:rPr lang="en-US" dirty="0"/>
+              <a:t>Precision: 86.2%</a:t>
+            </a:r>
+          </a:p>
+          <a:p>
+            <a:pPr marL="342900" indent="-342900">
+              <a:buFont typeface="Wingdings" panose="05000000000000000000" pitchFamily="2" charset="2"/>
+              <a:buChar char="Ø"/>
+            </a:pPr>
+            <a:r>
+              <a:rPr lang="en-US" dirty="0"/>
+              <a:t>Recall: 86.8%</a:t>
+            </a:r>
+          </a:p>
+          <a:p>
+            <a:pPr marL="342900" indent="-342900">
+              <a:buFont typeface="Wingdings" panose="05000000000000000000" pitchFamily="2" charset="2"/>
+              <a:buChar char="Ø"/>
+            </a:pPr>
+            <a:r>
+              <a:rPr lang="en-US" dirty="0"/>
+              <a:t>Specificity: 94.0%</a:t>
+            </a:r>
+          </a:p>
+          <a:p>
+            <a:pPr marL="342900" indent="-342900">
+              <a:buFont typeface="Wingdings" panose="05000000000000000000" pitchFamily="2" charset="2"/>
+              <a:buChar char="Ø"/>
+            </a:pPr>
+            <a:r>
+              <a:rPr lang="en-US" dirty="0"/>
+              <a:t>F1 Score: 86.5%</a:t>
+            </a:r>
+          </a:p>
+          <a:p>
+            <a:endParaRPr lang="en-US" dirty="0"/>
+          </a:p>
+        </p:txBody>
+      </p:sp>
+    </p:spTree>
+    <p:extLst>
+      <p:ext uri="{BB962C8B-B14F-4D97-AF65-F5344CB8AC3E}">
+        <p14:creationId xmlns:p14="http://schemas.microsoft.com/office/powerpoint/2010/main" val="1644237644"/>
       </p:ext>
     </p:extLst>
   </p:cSld>
@@ -23125,6 +23060,132 @@
 </file>
 
 <file path=ppt/slides/slide15.xml><?xml version="1.0" encoding="utf-8"?>
+<p:sld xmlns:a="http://schemas.openxmlformats.org/drawingml/2006/main" xmlns:r="http://schemas.openxmlformats.org/officeDocument/2006/relationships" xmlns:p="http://schemas.openxmlformats.org/presentationml/2006/main">
+  <p:cSld>
+    <p:spTree>
+      <p:nvGrpSpPr>
+        <p:cNvPr id="1" name=""/>
+        <p:cNvGrpSpPr/>
+        <p:nvPr/>
+      </p:nvGrpSpPr>
+      <p:grpSpPr>
+        <a:xfrm>
+          <a:off x="0" y="0"/>
+          <a:ext cx="0" cy="0"/>
+          <a:chOff x="0" y="0"/>
+          <a:chExt cx="0" cy="0"/>
+        </a:xfrm>
+      </p:grpSpPr>
+      <p:sp>
+        <p:nvSpPr>
+          <p:cNvPr id="2" name="Title 1">
+            <a:extLst>
+              <a:ext uri="{FF2B5EF4-FFF2-40B4-BE49-F238E27FC236}">
+                <a16:creationId xmlns:a16="http://schemas.microsoft.com/office/drawing/2014/main" id="{3F1BD324-3938-2C4E-21C8-9B9FC5FB805D}"/>
+              </a:ext>
+            </a:extLst>
+          </p:cNvPr>
+          <p:cNvSpPr>
+            <a:spLocks noGrp="1"/>
+          </p:cNvSpPr>
+          <p:nvPr>
+            <p:ph type="title"/>
+          </p:nvPr>
+        </p:nvSpPr>
+        <p:spPr>
+          <a:xfrm>
+            <a:off x="433914" y="478525"/>
+            <a:ext cx="11328403" cy="315407"/>
+          </a:xfrm>
+        </p:spPr>
+        <p:txBody>
+          <a:bodyPr wrap="square" anchor="b">
+            <a:normAutofit/>
+          </a:bodyPr>
+          <a:lstStyle/>
+          <a:p>
+            <a:r>
+              <a:rPr lang="en-US" dirty="0"/>
+              <a:t>FUTURE SCOPE</a:t>
+            </a:r>
+          </a:p>
+        </p:txBody>
+      </p:sp>
+      <p:sp>
+        <p:nvSpPr>
+          <p:cNvPr id="9" name="Text Placeholder 2">
+            <a:extLst>
+              <a:ext uri="{FF2B5EF4-FFF2-40B4-BE49-F238E27FC236}">
+                <a16:creationId xmlns:a16="http://schemas.microsoft.com/office/drawing/2014/main" id="{7F814F98-0803-5309-A188-9950E937BD46}"/>
+              </a:ext>
+            </a:extLst>
+          </p:cNvPr>
+          <p:cNvSpPr>
+            <a:spLocks noGrp="1"/>
+          </p:cNvSpPr>
+          <p:nvPr>
+            <p:ph type="body" sz="quarter" idx="13"/>
+          </p:nvPr>
+        </p:nvSpPr>
+        <p:spPr>
+          <a:xfrm>
+            <a:off x="431999" y="6000001"/>
+            <a:ext cx="11329919" cy="192097"/>
+          </a:xfrm>
+        </p:spPr>
+        <p:txBody>
+          <a:bodyPr/>
+          <a:lstStyle/>
+          <a:p>
+            <a:endParaRPr lang="en-US"/>
+          </a:p>
+        </p:txBody>
+      </p:sp>
+      <p:graphicFrame>
+        <p:nvGraphicFramePr>
+          <p:cNvPr id="5" name="Content Placeholder 2">
+            <a:extLst>
+              <a:ext uri="{FF2B5EF4-FFF2-40B4-BE49-F238E27FC236}">
+                <a16:creationId xmlns:a16="http://schemas.microsoft.com/office/drawing/2014/main" id="{D11705EE-6BA8-0A8D-E28F-0C7A9B2E5C9F}"/>
+              </a:ext>
+            </a:extLst>
+          </p:cNvPr>
+          <p:cNvGraphicFramePr>
+            <a:graphicFrameLocks noGrp="1"/>
+          </p:cNvGraphicFramePr>
+          <p:nvPr>
+            <p:ph sz="quarter" idx="16"/>
+            <p:extLst>
+              <p:ext uri="{D42A27DB-BD31-4B8C-83A1-F6EECF244321}">
+                <p14:modId xmlns:p14="http://schemas.microsoft.com/office/powerpoint/2010/main" val="387229520"/>
+              </p:ext>
+            </p:extLst>
+          </p:nvPr>
+        </p:nvGraphicFramePr>
+        <p:xfrm>
+          <a:off x="720000" y="1414914"/>
+          <a:ext cx="8395124" cy="4031652"/>
+        </p:xfrm>
+        <a:graphic>
+          <a:graphicData uri="http://schemas.openxmlformats.org/drawingml/2006/diagram">
+            <dgm:relIds xmlns:dgm="http://schemas.openxmlformats.org/drawingml/2006/diagram" xmlns:r="http://schemas.openxmlformats.org/officeDocument/2006/relationships" r:dm="rId2" r:lo="rId3" r:qs="rId4" r:cs="rId5"/>
+          </a:graphicData>
+        </a:graphic>
+      </p:graphicFrame>
+    </p:spTree>
+    <p:extLst>
+      <p:ext uri="{BB962C8B-B14F-4D97-AF65-F5344CB8AC3E}">
+        <p14:creationId xmlns:p14="http://schemas.microsoft.com/office/powerpoint/2010/main" val="2734096306"/>
+      </p:ext>
+    </p:extLst>
+  </p:cSld>
+  <p:clrMapOvr>
+    <a:masterClrMapping/>
+  </p:clrMapOvr>
+</p:sld>
+</file>
+
+<file path=ppt/slides/slide16.xml><?xml version="1.0" encoding="utf-8"?>
 <p:sld xmlns:a="http://schemas.openxmlformats.org/drawingml/2006/main" xmlns:r="http://schemas.openxmlformats.org/officeDocument/2006/relationships" xmlns:p="http://schemas.openxmlformats.org/presentationml/2006/main">
   <p:cSld>
     <p:spTree>
@@ -23202,7 +23263,7 @@
                 <a:ea typeface="+mj-ea"/>
                 <a:cs typeface="Arial" pitchFamily="34" charset="0"/>
               </a:rPr>
-              <a:t>What unique do we offer?</a:t>
+              <a:t>Conclusion</a:t>
             </a:r>
           </a:p>
         </p:txBody>
@@ -23515,230 +23576,6 @@
 </p:sld>
 </file>
 
-<file path=ppt/slides/slide16.xml><?xml version="1.0" encoding="utf-8"?>
-<p:sld xmlns:a="http://schemas.openxmlformats.org/drawingml/2006/main" xmlns:r="http://schemas.openxmlformats.org/officeDocument/2006/relationships" xmlns:p="http://schemas.openxmlformats.org/presentationml/2006/main">
-  <p:cSld>
-    <p:spTree>
-      <p:nvGrpSpPr>
-        <p:cNvPr id="1" name=""/>
-        <p:cNvGrpSpPr/>
-        <p:nvPr/>
-      </p:nvGrpSpPr>
-      <p:grpSpPr>
-        <a:xfrm>
-          <a:off x="0" y="0"/>
-          <a:ext cx="0" cy="0"/>
-          <a:chOff x="0" y="0"/>
-          <a:chExt cx="0" cy="0"/>
-        </a:xfrm>
-      </p:grpSpPr>
-      <p:sp>
-        <p:nvSpPr>
-          <p:cNvPr id="2" name="Title 1">
-            <a:extLst>
-              <a:ext uri="{FF2B5EF4-FFF2-40B4-BE49-F238E27FC236}">
-                <a16:creationId xmlns:a16="http://schemas.microsoft.com/office/drawing/2014/main" id="{3F1BD324-3938-2C4E-21C8-9B9FC5FB805D}"/>
-              </a:ext>
-            </a:extLst>
-          </p:cNvPr>
-          <p:cNvSpPr>
-            <a:spLocks noGrp="1"/>
-          </p:cNvSpPr>
-          <p:nvPr>
-            <p:ph type="title"/>
-          </p:nvPr>
-        </p:nvSpPr>
-        <p:spPr>
-          <a:xfrm>
-            <a:off x="433915" y="478525"/>
-            <a:ext cx="7437967" cy="315407"/>
-          </a:xfrm>
-        </p:spPr>
-        <p:txBody>
-          <a:bodyPr wrap="square" anchor="b">
-            <a:normAutofit/>
-          </a:bodyPr>
-          <a:lstStyle/>
-          <a:p>
-            <a:r>
-              <a:rPr lang="en-US" dirty="0"/>
-              <a:t>TEST RESULTS</a:t>
-            </a:r>
-          </a:p>
-        </p:txBody>
-      </p:sp>
-      <p:sp>
-        <p:nvSpPr>
-          <p:cNvPr id="14" name="Text Placeholder 2">
-            <a:extLst>
-              <a:ext uri="{FF2B5EF4-FFF2-40B4-BE49-F238E27FC236}">
-                <a16:creationId xmlns:a16="http://schemas.microsoft.com/office/drawing/2014/main" id="{377F1C19-1000-3F80-18D0-C53E68129FB2}"/>
-              </a:ext>
-            </a:extLst>
-          </p:cNvPr>
-          <p:cNvSpPr>
-            <a:spLocks noGrp="1"/>
-          </p:cNvSpPr>
-          <p:nvPr>
-            <p:ph type="body" sz="quarter" idx="13"/>
-          </p:nvPr>
-        </p:nvSpPr>
-        <p:spPr>
-          <a:xfrm>
-            <a:off x="432000" y="6000001"/>
-            <a:ext cx="7439881" cy="192097"/>
-          </a:xfrm>
-        </p:spPr>
-        <p:txBody>
-          <a:bodyPr/>
-          <a:lstStyle/>
-          <a:p>
-            <a:endParaRPr lang="en-US"/>
-          </a:p>
-        </p:txBody>
-      </p:sp>
-      <p:sp>
-        <p:nvSpPr>
-          <p:cNvPr id="8" name="Content Placeholder 2">
-            <a:extLst>
-              <a:ext uri="{FF2B5EF4-FFF2-40B4-BE49-F238E27FC236}">
-                <a16:creationId xmlns:a16="http://schemas.microsoft.com/office/drawing/2014/main" id="{BFB31D85-76C1-BAC8-B9D3-5A518A59FB27}"/>
-              </a:ext>
-            </a:extLst>
-          </p:cNvPr>
-          <p:cNvSpPr>
-            <a:spLocks noGrp="1"/>
-          </p:cNvSpPr>
-          <p:nvPr>
-            <p:ph type="body" sz="quarter" idx="15"/>
-          </p:nvPr>
-        </p:nvSpPr>
-        <p:spPr>
-          <a:xfrm>
-            <a:off x="431800" y="1534584"/>
-            <a:ext cx="7440613" cy="3951287"/>
-          </a:xfrm>
-        </p:spPr>
-        <p:txBody>
-          <a:bodyPr vert="horz" lIns="0" tIns="0" rIns="0" bIns="0" rtlCol="0">
-            <a:normAutofit/>
-          </a:bodyPr>
-          <a:lstStyle/>
-          <a:p>
-            <a:pPr marL="342900" indent="-342900">
-              <a:buFont typeface="Wingdings" panose="05000000000000000000" pitchFamily="2" charset="2"/>
-              <a:buChar char="Ø"/>
-            </a:pPr>
-            <a:r>
-              <a:rPr lang="en-US" dirty="0"/>
-              <a:t>True Positive (TP): 540 (26.25%)</a:t>
-            </a:r>
-          </a:p>
-          <a:p>
-            <a:pPr marL="342900" indent="-342900">
-              <a:buFont typeface="Wingdings" panose="05000000000000000000" pitchFamily="2" charset="2"/>
-              <a:buChar char="Ø"/>
-            </a:pPr>
-            <a:r>
-              <a:rPr lang="en-US" dirty="0"/>
-              <a:t>True Negative (TN): 1350 (65.6%)</a:t>
-            </a:r>
-          </a:p>
-          <a:p>
-            <a:pPr marL="342900" indent="-342900">
-              <a:buFont typeface="Wingdings" panose="05000000000000000000" pitchFamily="2" charset="2"/>
-              <a:buChar char="Ø"/>
-            </a:pPr>
-            <a:r>
-              <a:rPr lang="en-US" dirty="0"/>
-              <a:t>False Positive (FP): 86 (4.18%)</a:t>
-            </a:r>
-          </a:p>
-          <a:p>
-            <a:pPr marL="342900" indent="-342900">
-              <a:buFont typeface="Wingdings" panose="05000000000000000000" pitchFamily="2" charset="2"/>
-              <a:buChar char="Ø"/>
-            </a:pPr>
-            <a:r>
-              <a:rPr lang="en-US" dirty="0"/>
-              <a:t>False Negative (FN): 82 (3.98%)</a:t>
-            </a:r>
-          </a:p>
-          <a:p>
-            <a:pPr marL="342900" indent="-342900">
-              <a:buFont typeface="Wingdings" panose="05000000000000000000" pitchFamily="2" charset="2"/>
-              <a:buChar char="Ø"/>
-            </a:pPr>
-            <a:endParaRPr lang="en-US" dirty="0"/>
-          </a:p>
-          <a:p>
-            <a:pPr marL="342900" indent="-342900">
-              <a:buFont typeface="Wingdings" panose="05000000000000000000" pitchFamily="2" charset="2"/>
-              <a:buChar char="Ø"/>
-            </a:pPr>
-            <a:r>
-              <a:rPr lang="en-US" dirty="0"/>
-              <a:t>Accuracy: 91.7%</a:t>
-            </a:r>
-          </a:p>
-          <a:p>
-            <a:pPr marL="342900" indent="-342900">
-              <a:buFont typeface="Wingdings" panose="05000000000000000000" pitchFamily="2" charset="2"/>
-              <a:buChar char="Ø"/>
-            </a:pPr>
-            <a:r>
-              <a:rPr lang="en-US" dirty="0"/>
-              <a:t>Precision: 86.2%</a:t>
-            </a:r>
-          </a:p>
-          <a:p>
-            <a:pPr marL="342900" indent="-342900">
-              <a:buFont typeface="Wingdings" panose="05000000000000000000" pitchFamily="2" charset="2"/>
-              <a:buChar char="Ø"/>
-            </a:pPr>
-            <a:r>
-              <a:rPr lang="en-US" dirty="0"/>
-              <a:t>Recall: 86.8%</a:t>
-            </a:r>
-          </a:p>
-          <a:p>
-            <a:pPr marL="342900" indent="-342900">
-              <a:buFont typeface="Wingdings" panose="05000000000000000000" pitchFamily="2" charset="2"/>
-              <a:buChar char="Ø"/>
-            </a:pPr>
-            <a:r>
-              <a:rPr lang="en-US" dirty="0"/>
-              <a:t>Specificity: 94.0%</a:t>
-            </a:r>
-          </a:p>
-          <a:p>
-            <a:pPr marL="342900" indent="-342900">
-              <a:buFont typeface="Wingdings" panose="05000000000000000000" pitchFamily="2" charset="2"/>
-              <a:buChar char="Ø"/>
-            </a:pPr>
-            <a:r>
-              <a:rPr lang="en-US" dirty="0"/>
-              <a:t>F1 Score: 86.5%</a:t>
-            </a:r>
-          </a:p>
-          <a:p>
-            <a:endParaRPr lang="en-US" dirty="0"/>
-          </a:p>
-        </p:txBody>
-      </p:sp>
-    </p:spTree>
-    <p:extLst>
-      <p:ext uri="{BB962C8B-B14F-4D97-AF65-F5344CB8AC3E}">
-        <p14:creationId xmlns:p14="http://schemas.microsoft.com/office/powerpoint/2010/main" val="1644237644"/>
-      </p:ext>
-    </p:extLst>
-  </p:cSld>
-  <p:clrMapOvr>
-    <a:masterClrMapping/>
-  </p:clrMapOvr>
-</p:sld>
-</file>
-
 <file path=ppt/slides/slide17.xml><?xml version="1.0" encoding="utf-8"?>
 <p:sld xmlns:a="http://schemas.openxmlformats.org/drawingml/2006/main" xmlns:r="http://schemas.openxmlformats.org/officeDocument/2006/relationships" xmlns:p="http://schemas.openxmlformats.org/presentationml/2006/main">
   <p:cSld>
@@ -23756,106 +23593,10 @@
           <a:chExt cx="0" cy="0"/>
         </a:xfrm>
       </p:grpSpPr>
-      <p:sp>
-        <p:nvSpPr>
-          <p:cNvPr id="2" name="Title 1">
-            <a:extLst>
-              <a:ext uri="{FF2B5EF4-FFF2-40B4-BE49-F238E27FC236}">
-                <a16:creationId xmlns:a16="http://schemas.microsoft.com/office/drawing/2014/main" id="{3F1BD324-3938-2C4E-21C8-9B9FC5FB805D}"/>
-              </a:ext>
-            </a:extLst>
-          </p:cNvPr>
-          <p:cNvSpPr>
-            <a:spLocks noGrp="1"/>
-          </p:cNvSpPr>
-          <p:nvPr>
-            <p:ph type="title"/>
-          </p:nvPr>
-        </p:nvSpPr>
-        <p:spPr>
-          <a:xfrm>
-            <a:off x="433914" y="478525"/>
-            <a:ext cx="11328403" cy="315407"/>
-          </a:xfrm>
-        </p:spPr>
-        <p:txBody>
-          <a:bodyPr wrap="square" anchor="b">
-            <a:normAutofit/>
-          </a:bodyPr>
-          <a:lstStyle/>
-          <a:p>
-            <a:r>
-              <a:rPr lang="en-US" dirty="0"/>
-              <a:t>FUTURE SCOPE</a:t>
-            </a:r>
-          </a:p>
-        </p:txBody>
-      </p:sp>
-      <p:sp>
-        <p:nvSpPr>
-          <p:cNvPr id="9" name="Text Placeholder 2">
-            <a:extLst>
-              <a:ext uri="{FF2B5EF4-FFF2-40B4-BE49-F238E27FC236}">
-                <a16:creationId xmlns:a16="http://schemas.microsoft.com/office/drawing/2014/main" id="{7F814F98-0803-5309-A188-9950E937BD46}"/>
-              </a:ext>
-            </a:extLst>
-          </p:cNvPr>
-          <p:cNvSpPr>
-            <a:spLocks noGrp="1"/>
-          </p:cNvSpPr>
-          <p:nvPr>
-            <p:ph type="body" sz="quarter" idx="13"/>
-          </p:nvPr>
-        </p:nvSpPr>
-        <p:spPr>
-          <a:xfrm>
-            <a:off x="431999" y="6000001"/>
-            <a:ext cx="11329919" cy="192097"/>
-          </a:xfrm>
-        </p:spPr>
-        <p:txBody>
-          <a:bodyPr/>
-          <a:lstStyle/>
-          <a:p>
-            <a:endParaRPr lang="en-US"/>
-          </a:p>
-        </p:txBody>
-      </p:sp>
-      <p:graphicFrame>
-        <p:nvGraphicFramePr>
-          <p:cNvPr id="5" name="Content Placeholder 2">
-            <a:extLst>
-              <a:ext uri="{FF2B5EF4-FFF2-40B4-BE49-F238E27FC236}">
-                <a16:creationId xmlns:a16="http://schemas.microsoft.com/office/drawing/2014/main" id="{D11705EE-6BA8-0A8D-E28F-0C7A9B2E5C9F}"/>
-              </a:ext>
-            </a:extLst>
-          </p:cNvPr>
-          <p:cNvGraphicFramePr>
-            <a:graphicFrameLocks noGrp="1"/>
-          </p:cNvGraphicFramePr>
-          <p:nvPr>
-            <p:ph sz="quarter" idx="16"/>
-            <p:extLst>
-              <p:ext uri="{D42A27DB-BD31-4B8C-83A1-F6EECF244321}">
-                <p14:modId xmlns:p14="http://schemas.microsoft.com/office/powerpoint/2010/main" val="387229520"/>
-              </p:ext>
-            </p:extLst>
-          </p:nvPr>
-        </p:nvGraphicFramePr>
-        <p:xfrm>
-          <a:off x="720000" y="1414914"/>
-          <a:ext cx="8395124" cy="4031652"/>
-        </p:xfrm>
-        <a:graphic>
-          <a:graphicData uri="http://schemas.openxmlformats.org/drawingml/2006/diagram">
-            <dgm:relIds xmlns:dgm="http://schemas.openxmlformats.org/drawingml/2006/diagram" xmlns:r="http://schemas.openxmlformats.org/officeDocument/2006/relationships" r:dm="rId2" r:lo="rId3" r:qs="rId4" r:cs="rId5"/>
-          </a:graphicData>
-        </a:graphic>
-      </p:graphicFrame>
     </p:spTree>
     <p:extLst>
       <p:ext uri="{BB962C8B-B14F-4D97-AF65-F5344CB8AC3E}">
-        <p14:creationId xmlns:p14="http://schemas.microsoft.com/office/powerpoint/2010/main" val="2734096306"/>
+        <p14:creationId xmlns:p14="http://schemas.microsoft.com/office/powerpoint/2010/main" val="3332806788"/>
       </p:ext>
     </p:extLst>
   </p:cSld>
@@ -24008,10 +23749,112 @@
           <a:chExt cx="0" cy="0"/>
         </a:xfrm>
       </p:grpSpPr>
+      <p:sp>
+        <p:nvSpPr>
+          <p:cNvPr id="2" name="Title 1">
+            <a:extLst>
+              <a:ext uri="{FF2B5EF4-FFF2-40B4-BE49-F238E27FC236}">
+                <a16:creationId xmlns:a16="http://schemas.microsoft.com/office/drawing/2014/main" id="{F1A0EEA3-69F9-AC5F-337D-13C0FED6E1B1}"/>
+              </a:ext>
+            </a:extLst>
+          </p:cNvPr>
+          <p:cNvSpPr>
+            <a:spLocks noGrp="1"/>
+          </p:cNvSpPr>
+          <p:nvPr>
+            <p:ph type="title"/>
+          </p:nvPr>
+        </p:nvSpPr>
+        <p:spPr>
+          <a:xfrm>
+            <a:off x="432000" y="478525"/>
+            <a:ext cx="11328000" cy="315407"/>
+          </a:xfrm>
+        </p:spPr>
+        <p:txBody>
+          <a:bodyPr anchor="b">
+            <a:normAutofit/>
+          </a:bodyPr>
+          <a:lstStyle/>
+          <a:p>
+            <a:r>
+              <a:rPr lang="en-US" dirty="0"/>
+              <a:t>FLOWCHART</a:t>
+            </a:r>
+          </a:p>
+        </p:txBody>
+      </p:sp>
+      <p:sp>
+        <p:nvSpPr>
+          <p:cNvPr id="15" name="Text Placeholder 2">
+            <a:extLst>
+              <a:ext uri="{FF2B5EF4-FFF2-40B4-BE49-F238E27FC236}">
+                <a16:creationId xmlns:a16="http://schemas.microsoft.com/office/drawing/2014/main" id="{C00EF28B-E2A8-280C-19B2-06204B19A83B}"/>
+              </a:ext>
+            </a:extLst>
+          </p:cNvPr>
+          <p:cNvSpPr>
+            <a:spLocks noGrp="1"/>
+          </p:cNvSpPr>
+          <p:nvPr>
+            <p:ph type="body" sz="quarter" idx="13"/>
+          </p:nvPr>
+        </p:nvSpPr>
+        <p:spPr>
+          <a:xfrm>
+            <a:off x="432000" y="6000001"/>
+            <a:ext cx="11328000" cy="192097"/>
+          </a:xfrm>
+        </p:spPr>
+        <p:txBody>
+          <a:bodyPr/>
+          <a:lstStyle/>
+          <a:p>
+            <a:endParaRPr lang="en-US"/>
+          </a:p>
+        </p:txBody>
+      </p:sp>
+      <p:pic>
+        <p:nvPicPr>
+          <p:cNvPr id="7" name="Picture 6" descr="A diagram of a computer system&#10;&#10;AI-generated content may be incorrect.">
+            <a:extLst>
+              <a:ext uri="{FF2B5EF4-FFF2-40B4-BE49-F238E27FC236}">
+                <a16:creationId xmlns:a16="http://schemas.microsoft.com/office/drawing/2014/main" id="{4B9391F7-159C-0F1A-6174-C30FBDBC0510}"/>
+              </a:ext>
+            </a:extLst>
+          </p:cNvPr>
+          <p:cNvPicPr>
+            <a:picLocks noChangeAspect="1"/>
+          </p:cNvPicPr>
+          <p:nvPr/>
+        </p:nvPicPr>
+        <p:blipFill>
+          <a:blip r:embed="rId2">
+            <a:extLst>
+              <a:ext uri="{28A0092B-C50C-407E-A947-70E740481C1C}">
+                <a14:useLocalDpi xmlns:a14="http://schemas.microsoft.com/office/drawing/2010/main" val="0"/>
+              </a:ext>
+            </a:extLst>
+          </a:blip>
+          <a:stretch>
+            <a:fillRect/>
+          </a:stretch>
+        </p:blipFill>
+        <p:spPr>
+          <a:xfrm>
+            <a:off x="3293669" y="1535113"/>
+            <a:ext cx="5604662" cy="3951287"/>
+          </a:xfrm>
+          <a:prstGeom prst="rect">
+            <a:avLst/>
+          </a:prstGeom>
+          <a:noFill/>
+        </p:spPr>
+      </p:pic>
     </p:spTree>
     <p:extLst>
       <p:ext uri="{BB962C8B-B14F-4D97-AF65-F5344CB8AC3E}">
-        <p14:creationId xmlns:p14="http://schemas.microsoft.com/office/powerpoint/2010/main" val="3332806788"/>
+        <p14:creationId xmlns:p14="http://schemas.microsoft.com/office/powerpoint/2010/main" val="4002182703"/>
       </p:ext>
     </p:extLst>
   </p:cSld>
@@ -24500,12 +24343,8 @@
           <a:lstStyle/>
           <a:p>
             <a:r>
-              <a:rPr lang="en-US" dirty="0" err="1"/>
-              <a:t>BUsiNESS</a:t>
-            </a:r>
-            <a:r>
               <a:rPr lang="en-US" dirty="0"/>
-              <a:t> OBJECTIVES</a:t>
+              <a:t>OBJECTIVES</a:t>
             </a:r>
           </a:p>
         </p:txBody>
@@ -24601,7 +24440,7 @@
             <p:ph sz="quarter" idx="16"/>
             <p:extLst>
               <p:ext uri="{D42A27DB-BD31-4B8C-83A1-F6EECF244321}">
-                <p14:modId xmlns:p14="http://schemas.microsoft.com/office/powerpoint/2010/main" val="2623489786"/>
+                <p14:modId xmlns:p14="http://schemas.microsoft.com/office/powerpoint/2010/main" val="810280295"/>
               </p:ext>
             </p:extLst>
           </p:nvPr>
@@ -24651,7 +24490,242 @@
           <p:cNvPr id="2" name="Title 1">
             <a:extLst>
               <a:ext uri="{FF2B5EF4-FFF2-40B4-BE49-F238E27FC236}">
-                <a16:creationId xmlns:a16="http://schemas.microsoft.com/office/drawing/2014/main" id="{F1A0EEA3-69F9-AC5F-337D-13C0FED6E1B1}"/>
+                <a16:creationId xmlns:a16="http://schemas.microsoft.com/office/drawing/2014/main" id="{2C3EFD84-E4A6-7CA8-04C7-0592F855334E}"/>
+              </a:ext>
+            </a:extLst>
+          </p:cNvPr>
+          <p:cNvSpPr txBox="1">
+            <a:spLocks/>
+          </p:cNvSpPr>
+          <p:nvPr/>
+        </p:nvSpPr>
+        <p:spPr>
+          <a:xfrm>
+            <a:off x="317700" y="278954"/>
+            <a:ext cx="11328000" cy="567591"/>
+          </a:xfrm>
+          <a:prstGeom prst="rect">
+            <a:avLst/>
+          </a:prstGeom>
+        </p:spPr>
+        <p:txBody>
+          <a:bodyPr/>
+          <a:lstStyle>
+            <a:lvl1pPr algn="l" defTabSz="1219170" rtl="0" eaLnBrk="1" fontAlgn="base" latinLnBrk="0" hangingPunct="1">
+              <a:lnSpc>
+                <a:spcPct val="75000"/>
+              </a:lnSpc>
+              <a:spcBef>
+                <a:spcPct val="0"/>
+              </a:spcBef>
+              <a:spcAft>
+                <a:spcPct val="0"/>
+              </a:spcAft>
+              <a:buNone/>
+              <a:defRPr lang="fr-FR" sz="2667" b="0" kern="1200" cap="all" baseline="0" noProof="0" dirty="0">
+                <a:solidFill>
+                  <a:schemeClr val="bg2"/>
+                </a:solidFill>
+                <a:latin typeface="+mj-lt"/>
+                <a:ea typeface="+mj-ea"/>
+                <a:cs typeface="Arial" pitchFamily="34" charset="0"/>
+              </a:defRPr>
+            </a:lvl1pPr>
+          </a:lstStyle>
+          <a:p>
+            <a:r>
+              <a:rPr lang="en-US" sz="3200" u="sng" dirty="0"/>
+              <a:t>UI snapshots</a:t>
+            </a:r>
+          </a:p>
+        </p:txBody>
+      </p:sp>
+      <p:pic>
+        <p:nvPicPr>
+          <p:cNvPr id="3" name="Picture 2">
+            <a:extLst>
+              <a:ext uri="{FF2B5EF4-FFF2-40B4-BE49-F238E27FC236}">
+                <a16:creationId xmlns:a16="http://schemas.microsoft.com/office/drawing/2014/main" id="{B3DFFC85-13E2-6811-D907-D8CF716FF1E1}"/>
+              </a:ext>
+            </a:extLst>
+          </p:cNvPr>
+          <p:cNvPicPr>
+            <a:picLocks noChangeAspect="1"/>
+          </p:cNvPicPr>
+          <p:nvPr/>
+        </p:nvPicPr>
+        <p:blipFill>
+          <a:blip r:embed="rId2"/>
+          <a:stretch>
+            <a:fillRect/>
+          </a:stretch>
+        </p:blipFill>
+        <p:spPr>
+          <a:xfrm>
+            <a:off x="852352" y="4135107"/>
+            <a:ext cx="3319411" cy="1950154"/>
+          </a:xfrm>
+          <a:prstGeom prst="rect">
+            <a:avLst/>
+          </a:prstGeom>
+        </p:spPr>
+      </p:pic>
+      <p:pic>
+        <p:nvPicPr>
+          <p:cNvPr id="6" name="Picture 5">
+            <a:extLst>
+              <a:ext uri="{FF2B5EF4-FFF2-40B4-BE49-F238E27FC236}">
+                <a16:creationId xmlns:a16="http://schemas.microsoft.com/office/drawing/2014/main" id="{4C736B58-F8F4-55E8-0502-840C21993539}"/>
+              </a:ext>
+            </a:extLst>
+          </p:cNvPr>
+          <p:cNvPicPr>
+            <a:picLocks noChangeAspect="1"/>
+          </p:cNvPicPr>
+          <p:nvPr/>
+        </p:nvPicPr>
+        <p:blipFill>
+          <a:blip r:embed="rId3"/>
+          <a:stretch>
+            <a:fillRect/>
+          </a:stretch>
+        </p:blipFill>
+        <p:spPr>
+          <a:xfrm>
+            <a:off x="4505740" y="4135107"/>
+            <a:ext cx="3451253" cy="2027611"/>
+          </a:xfrm>
+          <a:prstGeom prst="rect">
+            <a:avLst/>
+          </a:prstGeom>
+        </p:spPr>
+      </p:pic>
+      <p:pic>
+        <p:nvPicPr>
+          <p:cNvPr id="7" name="Picture 6">
+            <a:extLst>
+              <a:ext uri="{FF2B5EF4-FFF2-40B4-BE49-F238E27FC236}">
+                <a16:creationId xmlns:a16="http://schemas.microsoft.com/office/drawing/2014/main" id="{F3193508-B472-59A6-5639-F2EA99D5B5F8}"/>
+              </a:ext>
+            </a:extLst>
+          </p:cNvPr>
+          <p:cNvPicPr>
+            <a:picLocks noChangeAspect="1"/>
+          </p:cNvPicPr>
+          <p:nvPr/>
+        </p:nvPicPr>
+        <p:blipFill>
+          <a:blip r:embed="rId4"/>
+          <a:stretch>
+            <a:fillRect/>
+          </a:stretch>
+        </p:blipFill>
+        <p:spPr>
+          <a:xfrm>
+            <a:off x="584741" y="1119439"/>
+            <a:ext cx="4767485" cy="2804403"/>
+          </a:xfrm>
+          <a:prstGeom prst="rect">
+            <a:avLst/>
+          </a:prstGeom>
+        </p:spPr>
+      </p:pic>
+      <p:pic>
+        <p:nvPicPr>
+          <p:cNvPr id="8" name="Picture 7">
+            <a:extLst>
+              <a:ext uri="{FF2B5EF4-FFF2-40B4-BE49-F238E27FC236}">
+                <a16:creationId xmlns:a16="http://schemas.microsoft.com/office/drawing/2014/main" id="{0A04EB4E-28F8-4CFC-CD97-2765D217D690}"/>
+              </a:ext>
+            </a:extLst>
+          </p:cNvPr>
+          <p:cNvPicPr>
+            <a:picLocks noChangeAspect="1"/>
+          </p:cNvPicPr>
+          <p:nvPr/>
+        </p:nvPicPr>
+        <p:blipFill>
+          <a:blip r:embed="rId5"/>
+          <a:stretch>
+            <a:fillRect/>
+          </a:stretch>
+        </p:blipFill>
+        <p:spPr>
+          <a:xfrm>
+            <a:off x="5827271" y="510139"/>
+            <a:ext cx="5818429" cy="3413703"/>
+          </a:xfrm>
+          <a:prstGeom prst="rect">
+            <a:avLst/>
+          </a:prstGeom>
+        </p:spPr>
+      </p:pic>
+      <p:pic>
+        <p:nvPicPr>
+          <p:cNvPr id="9" name="Picture 8">
+            <a:extLst>
+              <a:ext uri="{FF2B5EF4-FFF2-40B4-BE49-F238E27FC236}">
+                <a16:creationId xmlns:a16="http://schemas.microsoft.com/office/drawing/2014/main" id="{BA85755C-5ABB-4636-8D35-C13DE285FEAB}"/>
+              </a:ext>
+            </a:extLst>
+          </p:cNvPr>
+          <p:cNvPicPr>
+            <a:picLocks noChangeAspect="1"/>
+          </p:cNvPicPr>
+          <p:nvPr/>
+        </p:nvPicPr>
+        <p:blipFill>
+          <a:blip r:embed="rId6"/>
+          <a:stretch>
+            <a:fillRect/>
+          </a:stretch>
+        </p:blipFill>
+        <p:spPr>
+          <a:xfrm>
+            <a:off x="8515965" y="4133789"/>
+            <a:ext cx="3451254" cy="2028929"/>
+          </a:xfrm>
+          <a:prstGeom prst="rect">
+            <a:avLst/>
+          </a:prstGeom>
+        </p:spPr>
+      </p:pic>
+    </p:spTree>
+    <p:extLst>
+      <p:ext uri="{BB962C8B-B14F-4D97-AF65-F5344CB8AC3E}">
+        <p14:creationId xmlns:p14="http://schemas.microsoft.com/office/powerpoint/2010/main" val="2726914751"/>
+      </p:ext>
+    </p:extLst>
+  </p:cSld>
+  <p:clrMapOvr>
+    <a:masterClrMapping/>
+  </p:clrMapOvr>
+</p:sld>
+</file>
+
+<file path=ppt/slides/slide6.xml><?xml version="1.0" encoding="utf-8"?>
+<p:sld xmlns:a="http://schemas.openxmlformats.org/drawingml/2006/main" xmlns:r="http://schemas.openxmlformats.org/officeDocument/2006/relationships" xmlns:p="http://schemas.openxmlformats.org/presentationml/2006/main">
+  <p:cSld>
+    <p:spTree>
+      <p:nvGrpSpPr>
+        <p:cNvPr id="1" name=""/>
+        <p:cNvGrpSpPr/>
+        <p:nvPr/>
+      </p:nvGrpSpPr>
+      <p:grpSpPr>
+        <a:xfrm>
+          <a:off x="0" y="0"/>
+          <a:ext cx="0" cy="0"/>
+          <a:chOff x="0" y="0"/>
+          <a:chExt cx="0" cy="0"/>
+        </a:xfrm>
+      </p:grpSpPr>
+      <p:sp>
+        <p:nvSpPr>
+          <p:cNvPr id="2" name="Title 1">
+            <a:extLst>
+              <a:ext uri="{FF2B5EF4-FFF2-40B4-BE49-F238E27FC236}">
+                <a16:creationId xmlns:a16="http://schemas.microsoft.com/office/drawing/2014/main" id="{79253DB2-D4EC-CF9E-6389-80A927BAC9BE}"/>
               </a:ext>
             </a:extLst>
           </p:cNvPr>
@@ -24664,29 +24738,252 @@
         </p:nvSpPr>
         <p:spPr>
           <a:xfrm>
-            <a:off x="432000" y="478525"/>
-            <a:ext cx="11328000" cy="315407"/>
+            <a:off x="433914" y="478525"/>
+            <a:ext cx="11328403" cy="315407"/>
           </a:xfrm>
         </p:spPr>
         <p:txBody>
-          <a:bodyPr anchor="b">
+          <a:bodyPr wrap="square" anchor="b">
             <a:normAutofit/>
           </a:bodyPr>
           <a:lstStyle/>
           <a:p>
             <a:r>
               <a:rPr lang="en-US" dirty="0"/>
-              <a:t>FLOWCHART</a:t>
+              <a:t>Swagger API</a:t>
             </a:r>
           </a:p>
         </p:txBody>
       </p:sp>
       <p:sp>
         <p:nvSpPr>
-          <p:cNvPr id="15" name="Text Placeholder 2">
+          <p:cNvPr id="12" name="Text Placeholder 2">
             <a:extLst>
               <a:ext uri="{FF2B5EF4-FFF2-40B4-BE49-F238E27FC236}">
-                <a16:creationId xmlns:a16="http://schemas.microsoft.com/office/drawing/2014/main" id="{C00EF28B-E2A8-280C-19B2-06204B19A83B}"/>
+                <a16:creationId xmlns:a16="http://schemas.microsoft.com/office/drawing/2014/main" id="{3F3799DC-43EB-3951-5B9B-E3AD07483F37}"/>
+              </a:ext>
+            </a:extLst>
+          </p:cNvPr>
+          <p:cNvSpPr>
+            <a:spLocks noGrp="1"/>
+          </p:cNvSpPr>
+          <p:nvPr>
+            <p:ph type="body" sz="quarter" idx="13"/>
+          </p:nvPr>
+        </p:nvSpPr>
+        <p:spPr>
+          <a:xfrm>
+            <a:off x="431999" y="6000001"/>
+            <a:ext cx="11329919" cy="192097"/>
+          </a:xfrm>
+        </p:spPr>
+        <p:txBody>
+          <a:bodyPr/>
+          <a:lstStyle/>
+          <a:p>
+            <a:endParaRPr lang="en-US"/>
+          </a:p>
+        </p:txBody>
+      </p:sp>
+      <p:pic>
+        <p:nvPicPr>
+          <p:cNvPr id="4" name="Picture 3" descr="A screenshot of a computer&#10;&#10;AI-generated content may be incorrect.">
+            <a:extLst>
+              <a:ext uri="{FF2B5EF4-FFF2-40B4-BE49-F238E27FC236}">
+                <a16:creationId xmlns:a16="http://schemas.microsoft.com/office/drawing/2014/main" id="{D318B62A-C04F-0B2C-1468-C28038A89210}"/>
+              </a:ext>
+            </a:extLst>
+          </p:cNvPr>
+          <p:cNvPicPr>
+            <a:picLocks noChangeAspect="1"/>
+          </p:cNvPicPr>
+          <p:nvPr/>
+        </p:nvPicPr>
+        <p:blipFill>
+          <a:blip r:embed="rId2">
+            <a:extLst>
+              <a:ext uri="{28A0092B-C50C-407E-A947-70E740481C1C}">
+                <a14:useLocalDpi xmlns:a14="http://schemas.microsoft.com/office/drawing/2010/main" val="0"/>
+              </a:ext>
+            </a:extLst>
+          </a:blip>
+          <a:srcRect r="29508"/>
+          <a:stretch>
+            <a:fillRect/>
+          </a:stretch>
+        </p:blipFill>
+        <p:spPr>
+          <a:xfrm>
+            <a:off x="6385917" y="1545873"/>
+            <a:ext cx="5376000" cy="4099200"/>
+          </a:xfrm>
+          <a:prstGeom prst="rect">
+            <a:avLst/>
+          </a:prstGeom>
+          <a:noFill/>
+        </p:spPr>
+      </p:pic>
+      <p:pic>
+        <p:nvPicPr>
+          <p:cNvPr id="7" name="Picture 6" descr="A screenshot of a computer&#10;&#10;AI-generated content may be incorrect.">
+            <a:extLst>
+              <a:ext uri="{FF2B5EF4-FFF2-40B4-BE49-F238E27FC236}">
+                <a16:creationId xmlns:a16="http://schemas.microsoft.com/office/drawing/2014/main" id="{1EE97E11-3F4B-226B-CEF5-E5936B5047D5}"/>
+              </a:ext>
+            </a:extLst>
+          </p:cNvPr>
+          <p:cNvPicPr>
+            <a:picLocks noChangeAspect="1"/>
+          </p:cNvPicPr>
+          <p:nvPr/>
+        </p:nvPicPr>
+        <p:blipFill>
+          <a:blip r:embed="rId3">
+            <a:extLst>
+              <a:ext uri="{28A0092B-C50C-407E-A947-70E740481C1C}">
+                <a14:useLocalDpi xmlns:a14="http://schemas.microsoft.com/office/drawing/2010/main" val="0"/>
+              </a:ext>
+            </a:extLst>
+          </a:blip>
+          <a:srcRect l="2473" r="22441"/>
+          <a:stretch>
+            <a:fillRect/>
+          </a:stretch>
+        </p:blipFill>
+        <p:spPr>
+          <a:xfrm>
+            <a:off x="431800" y="1535113"/>
+            <a:ext cx="5519738" cy="3951287"/>
+          </a:xfrm>
+          <a:prstGeom prst="rect">
+            <a:avLst/>
+          </a:prstGeom>
+          <a:noFill/>
+        </p:spPr>
+      </p:pic>
+    </p:spTree>
+    <p:extLst>
+      <p:ext uri="{BB962C8B-B14F-4D97-AF65-F5344CB8AC3E}">
+        <p14:creationId xmlns:p14="http://schemas.microsoft.com/office/powerpoint/2010/main" val="3902786273"/>
+      </p:ext>
+    </p:extLst>
+  </p:cSld>
+  <p:clrMapOvr>
+    <a:masterClrMapping/>
+  </p:clrMapOvr>
+</p:sld>
+</file>
+
+<file path=ppt/slides/slide7.xml><?xml version="1.0" encoding="utf-8"?>
+<p:sld xmlns:a="http://schemas.openxmlformats.org/drawingml/2006/main" xmlns:r="http://schemas.openxmlformats.org/officeDocument/2006/relationships" xmlns:p="http://schemas.openxmlformats.org/presentationml/2006/main">
+  <p:cSld>
+    <p:spTree>
+      <p:nvGrpSpPr>
+        <p:cNvPr id="1" name=""/>
+        <p:cNvGrpSpPr/>
+        <p:nvPr/>
+      </p:nvGrpSpPr>
+      <p:grpSpPr>
+        <a:xfrm>
+          <a:off x="0" y="0"/>
+          <a:ext cx="0" cy="0"/>
+          <a:chOff x="0" y="0"/>
+          <a:chExt cx="0" cy="0"/>
+        </a:xfrm>
+      </p:grpSpPr>
+      <p:sp>
+        <p:nvSpPr>
+          <p:cNvPr id="2" name="Title 1">
+            <a:extLst>
+              <a:ext uri="{FF2B5EF4-FFF2-40B4-BE49-F238E27FC236}">
+                <a16:creationId xmlns:a16="http://schemas.microsoft.com/office/drawing/2014/main" id="{2C3EFD84-E4A6-7CA8-04C7-0592F855334E}"/>
+              </a:ext>
+            </a:extLst>
+          </p:cNvPr>
+          <p:cNvSpPr txBox="1">
+            <a:spLocks/>
+          </p:cNvSpPr>
+          <p:nvPr/>
+        </p:nvSpPr>
+        <p:spPr>
+          <a:xfrm>
+            <a:off x="432000" y="478525"/>
+            <a:ext cx="11328000" cy="315407"/>
+          </a:xfrm>
+          <a:prstGeom prst="rect">
+            <a:avLst/>
+          </a:prstGeom>
+        </p:spPr>
+        <p:txBody>
+          <a:bodyPr vert="horz" lIns="0" tIns="0" rIns="0" bIns="0" rtlCol="0" anchor="b">
+            <a:normAutofit/>
+          </a:bodyPr>
+          <a:lstStyle>
+            <a:lvl1pPr algn="l" defTabSz="1219170" rtl="0" eaLnBrk="1" fontAlgn="base" latinLnBrk="0" hangingPunct="1">
+              <a:lnSpc>
+                <a:spcPct val="75000"/>
+              </a:lnSpc>
+              <a:spcBef>
+                <a:spcPct val="0"/>
+              </a:spcBef>
+              <a:spcAft>
+                <a:spcPct val="0"/>
+              </a:spcAft>
+              <a:buNone/>
+              <a:defRPr lang="fr-FR" sz="2667" b="0" kern="1200" cap="all" baseline="0" noProof="0" dirty="0">
+                <a:solidFill>
+                  <a:schemeClr val="bg2"/>
+                </a:solidFill>
+                <a:latin typeface="+mj-lt"/>
+                <a:ea typeface="+mj-ea"/>
+                <a:cs typeface="Arial" pitchFamily="34" charset="0"/>
+              </a:defRPr>
+            </a:lvl1pPr>
+          </a:lstStyle>
+          <a:p>
+            <a:pPr>
+              <a:spcAft>
+                <a:spcPts val="600"/>
+              </a:spcAft>
+            </a:pPr>
+            <a:r>
+              <a:rPr lang="en-US" b="0" kern="1200" cap="all" baseline="0" noProof="0" dirty="0">
+                <a:latin typeface="+mj-lt"/>
+                <a:ea typeface="+mj-ea"/>
+                <a:cs typeface="Arial" pitchFamily="34" charset="0"/>
+              </a:rPr>
+              <a:t>Npm package (</a:t>
+            </a:r>
+            <a:r>
+              <a:rPr lang="en-IN" dirty="0">
+                <a:hlinkClick r:id="rId2"/>
+              </a:rPr>
+              <a:t>@sgbots/data-anonymiser – </a:t>
+            </a:r>
+            <a:r>
+              <a:rPr lang="en-IN" dirty="0" err="1">
+                <a:hlinkClick r:id="rId2"/>
+              </a:rPr>
+              <a:t>npm</a:t>
+            </a:r>
+            <a:r>
+              <a:rPr lang="en-IN" dirty="0"/>
+              <a:t>)</a:t>
+            </a:r>
+            <a:endParaRPr lang="en-US" b="0" kern="1200" cap="all" baseline="0" noProof="0" dirty="0">
+              <a:latin typeface="+mj-lt"/>
+              <a:ea typeface="+mj-ea"/>
+              <a:cs typeface="Arial" pitchFamily="34" charset="0"/>
+            </a:endParaRPr>
+          </a:p>
+        </p:txBody>
+      </p:sp>
+      <p:sp>
+        <p:nvSpPr>
+          <p:cNvPr id="10" name="Text Placeholder 2">
+            <a:extLst>
+              <a:ext uri="{FF2B5EF4-FFF2-40B4-BE49-F238E27FC236}">
+                <a16:creationId xmlns:a16="http://schemas.microsoft.com/office/drawing/2014/main" id="{03D0DDA7-2289-0CD8-3A08-520458727FC5}"/>
               </a:ext>
             </a:extLst>
           </p:cNvPr>
@@ -24713,10 +25010,10 @@
       </p:sp>
       <p:pic>
         <p:nvPicPr>
-          <p:cNvPr id="7" name="Picture 6" descr="A diagram of a computer system&#10;&#10;AI-generated content may be incorrect.">
+          <p:cNvPr id="5" name="Picture 4">
             <a:extLst>
               <a:ext uri="{FF2B5EF4-FFF2-40B4-BE49-F238E27FC236}">
-                <a16:creationId xmlns:a16="http://schemas.microsoft.com/office/drawing/2014/main" id="{4B9391F7-159C-0F1A-6174-C30FBDBC0510}"/>
+                <a16:creationId xmlns:a16="http://schemas.microsoft.com/office/drawing/2014/main" id="{1D2AF117-000B-7873-F7A4-908497C4E4E2}"/>
               </a:ext>
             </a:extLst>
           </p:cNvPr>
@@ -24726,21 +25023,15 @@
           <p:nvPr/>
         </p:nvPicPr>
         <p:blipFill>
-          <a:blip r:embed="rId2">
-            <a:extLst>
-              <a:ext uri="{28A0092B-C50C-407E-A947-70E740481C1C}">
-                <a14:useLocalDpi xmlns:a14="http://schemas.microsoft.com/office/drawing/2010/main" val="0"/>
-              </a:ext>
-            </a:extLst>
-          </a:blip>
+          <a:blip r:embed="rId3"/>
           <a:stretch>
             <a:fillRect/>
           </a:stretch>
         </p:blipFill>
         <p:spPr>
           <a:xfrm>
-            <a:off x="3293669" y="1535113"/>
-            <a:ext cx="5604662" cy="3951287"/>
+            <a:off x="2733202" y="1535113"/>
+            <a:ext cx="6725596" cy="3951287"/>
           </a:xfrm>
           <a:prstGeom prst="rect">
             <a:avLst/>
@@ -24751,7 +25042,7 @@
     </p:spTree>
     <p:extLst>
       <p:ext uri="{BB962C8B-B14F-4D97-AF65-F5344CB8AC3E}">
-        <p14:creationId xmlns:p14="http://schemas.microsoft.com/office/powerpoint/2010/main" val="4002182703"/>
+        <p14:creationId xmlns:p14="http://schemas.microsoft.com/office/powerpoint/2010/main" val="3442851545"/>
       </p:ext>
     </p:extLst>
   </p:cSld>
@@ -24761,7 +25052,7 @@
 </p:sld>
 </file>
 
-<file path=ppt/slides/slide6.xml><?xml version="1.0" encoding="utf-8"?>
+<file path=ppt/slides/slide8.xml><?xml version="1.0" encoding="utf-8"?>
 <p:sld xmlns:a="http://schemas.openxmlformats.org/drawingml/2006/main" xmlns:r="http://schemas.openxmlformats.org/officeDocument/2006/relationships" xmlns:p="http://schemas.openxmlformats.org/presentationml/2006/main">
   <p:cSld>
     <p:spTree>
@@ -25030,7 +25321,7 @@
 </p:sld>
 </file>
 
-<file path=ppt/slides/slide7.xml><?xml version="1.0" encoding="utf-8"?>
+<file path=ppt/slides/slide9.xml><?xml version="1.0" encoding="utf-8"?>
 <p:sld xmlns:a="http://schemas.openxmlformats.org/drawingml/2006/main" xmlns:r="http://schemas.openxmlformats.org/officeDocument/2006/relationships" xmlns:p="http://schemas.openxmlformats.org/presentationml/2006/main">
   <p:cSld>
     <p:spTree>
@@ -25153,301 +25444,6 @@
     <p:extLst>
       <p:ext uri="{BB962C8B-B14F-4D97-AF65-F5344CB8AC3E}">
         <p14:creationId xmlns:p14="http://schemas.microsoft.com/office/powerpoint/2010/main" val="2380880966"/>
-      </p:ext>
-    </p:extLst>
-  </p:cSld>
-  <p:clrMapOvr>
-    <a:masterClrMapping/>
-  </p:clrMapOvr>
-</p:sld>
-</file>
-
-<file path=ppt/slides/slide8.xml><?xml version="1.0" encoding="utf-8"?>
-<p:sld xmlns:a="http://schemas.openxmlformats.org/drawingml/2006/main" xmlns:r="http://schemas.openxmlformats.org/officeDocument/2006/relationships" xmlns:p="http://schemas.openxmlformats.org/presentationml/2006/main">
-  <p:cSld>
-    <p:spTree>
-      <p:nvGrpSpPr>
-        <p:cNvPr id="1" name=""/>
-        <p:cNvGrpSpPr/>
-        <p:nvPr/>
-      </p:nvGrpSpPr>
-      <p:grpSpPr>
-        <a:xfrm>
-          <a:off x="0" y="0"/>
-          <a:ext cx="0" cy="0"/>
-          <a:chOff x="0" y="0"/>
-          <a:chExt cx="0" cy="0"/>
-        </a:xfrm>
-      </p:grpSpPr>
-      <p:sp>
-        <p:nvSpPr>
-          <p:cNvPr id="4" name="Title 1">
-            <a:extLst>
-              <a:ext uri="{FF2B5EF4-FFF2-40B4-BE49-F238E27FC236}">
-                <a16:creationId xmlns:a16="http://schemas.microsoft.com/office/drawing/2014/main" id="{3FEA1D7B-DD5A-8515-8C77-2A3294B2EF7E}"/>
-              </a:ext>
-            </a:extLst>
-          </p:cNvPr>
-          <p:cNvSpPr>
-            <a:spLocks noGrp="1"/>
-          </p:cNvSpPr>
-          <p:nvPr>
-            <p:ph type="title"/>
-          </p:nvPr>
-        </p:nvSpPr>
-        <p:spPr>
-          <a:xfrm>
-            <a:off x="432000" y="478525"/>
-            <a:ext cx="11328000" cy="315407"/>
-          </a:xfrm>
-        </p:spPr>
-        <p:txBody>
-          <a:bodyPr anchor="b">
-            <a:normAutofit/>
-          </a:bodyPr>
-          <a:lstStyle/>
-          <a:p>
-            <a:r>
-              <a:rPr lang="en-US" dirty="0"/>
-              <a:t>Database schema</a:t>
-            </a:r>
-          </a:p>
-        </p:txBody>
-      </p:sp>
-      <p:sp>
-        <p:nvSpPr>
-          <p:cNvPr id="12" name="Text Placeholder 2">
-            <a:extLst>
-              <a:ext uri="{FF2B5EF4-FFF2-40B4-BE49-F238E27FC236}">
-                <a16:creationId xmlns:a16="http://schemas.microsoft.com/office/drawing/2014/main" id="{81A44827-DCB9-18D1-64BF-4D165EB28B29}"/>
-              </a:ext>
-            </a:extLst>
-          </p:cNvPr>
-          <p:cNvSpPr>
-            <a:spLocks noGrp="1"/>
-          </p:cNvSpPr>
-          <p:nvPr>
-            <p:ph type="body" sz="quarter" idx="13"/>
-          </p:nvPr>
-        </p:nvSpPr>
-        <p:spPr>
-          <a:xfrm>
-            <a:off x="432000" y="6000001"/>
-            <a:ext cx="11328000" cy="192097"/>
-          </a:xfrm>
-        </p:spPr>
-        <p:txBody>
-          <a:bodyPr/>
-          <a:lstStyle/>
-          <a:p>
-            <a:endParaRPr lang="en-US"/>
-          </a:p>
-        </p:txBody>
-      </p:sp>
-      <p:pic>
-        <p:nvPicPr>
-          <p:cNvPr id="7" name="Picture 6" descr="A screenshot of a computer&#10;&#10;AI-generated content may be incorrect.">
-            <a:extLst>
-              <a:ext uri="{FF2B5EF4-FFF2-40B4-BE49-F238E27FC236}">
-                <a16:creationId xmlns:a16="http://schemas.microsoft.com/office/drawing/2014/main" id="{00D514F6-9507-86C3-9550-89271438B9FE}"/>
-              </a:ext>
-            </a:extLst>
-          </p:cNvPr>
-          <p:cNvPicPr>
-            <a:picLocks noChangeAspect="1"/>
-          </p:cNvPicPr>
-          <p:nvPr/>
-        </p:nvPicPr>
-        <p:blipFill>
-          <a:blip r:embed="rId2">
-            <a:extLst>
-              <a:ext uri="{28A0092B-C50C-407E-A947-70E740481C1C}">
-                <a14:useLocalDpi xmlns:a14="http://schemas.microsoft.com/office/drawing/2010/main" val="0"/>
-              </a:ext>
-            </a:extLst>
-          </a:blip>
-          <a:stretch>
-            <a:fillRect/>
-          </a:stretch>
-        </p:blipFill>
-        <p:spPr>
-          <a:xfrm>
-            <a:off x="3169121" y="1535113"/>
-            <a:ext cx="5853758" cy="3951287"/>
-          </a:xfrm>
-          <a:prstGeom prst="rect">
-            <a:avLst/>
-          </a:prstGeom>
-          <a:noFill/>
-        </p:spPr>
-      </p:pic>
-    </p:spTree>
-    <p:extLst>
-      <p:ext uri="{BB962C8B-B14F-4D97-AF65-F5344CB8AC3E}">
-        <p14:creationId xmlns:p14="http://schemas.microsoft.com/office/powerpoint/2010/main" val="1785703018"/>
-      </p:ext>
-    </p:extLst>
-  </p:cSld>
-  <p:clrMapOvr>
-    <a:masterClrMapping/>
-  </p:clrMapOvr>
-</p:sld>
-</file>
-
-<file path=ppt/slides/slide9.xml><?xml version="1.0" encoding="utf-8"?>
-<p:sld xmlns:a="http://schemas.openxmlformats.org/drawingml/2006/main" xmlns:r="http://schemas.openxmlformats.org/officeDocument/2006/relationships" xmlns:p="http://schemas.openxmlformats.org/presentationml/2006/main">
-  <p:cSld>
-    <p:spTree>
-      <p:nvGrpSpPr>
-        <p:cNvPr id="1" name=""/>
-        <p:cNvGrpSpPr/>
-        <p:nvPr/>
-      </p:nvGrpSpPr>
-      <p:grpSpPr>
-        <a:xfrm>
-          <a:off x="0" y="0"/>
-          <a:ext cx="0" cy="0"/>
-          <a:chOff x="0" y="0"/>
-          <a:chExt cx="0" cy="0"/>
-        </a:xfrm>
-      </p:grpSpPr>
-      <p:sp>
-        <p:nvSpPr>
-          <p:cNvPr id="2" name="Title 1">
-            <a:extLst>
-              <a:ext uri="{FF2B5EF4-FFF2-40B4-BE49-F238E27FC236}">
-                <a16:creationId xmlns:a16="http://schemas.microsoft.com/office/drawing/2014/main" id="{42EB3A37-DC80-EBBA-D68E-55471ACA9026}"/>
-              </a:ext>
-            </a:extLst>
-          </p:cNvPr>
-          <p:cNvSpPr txBox="1">
-            <a:spLocks/>
-          </p:cNvSpPr>
-          <p:nvPr/>
-        </p:nvSpPr>
-        <p:spPr>
-          <a:xfrm>
-            <a:off x="432000" y="478525"/>
-            <a:ext cx="11328000" cy="315407"/>
-          </a:xfrm>
-          <a:prstGeom prst="rect">
-            <a:avLst/>
-          </a:prstGeom>
-        </p:spPr>
-        <p:txBody>
-          <a:bodyPr vert="horz" lIns="0" tIns="0" rIns="0" bIns="0" rtlCol="0" anchor="b">
-            <a:normAutofit/>
-          </a:bodyPr>
-          <a:lstStyle>
-            <a:lvl1pPr algn="l" defTabSz="1219170" rtl="0" eaLnBrk="1" fontAlgn="base" latinLnBrk="0" hangingPunct="1">
-              <a:lnSpc>
-                <a:spcPct val="75000"/>
-              </a:lnSpc>
-              <a:spcBef>
-                <a:spcPct val="0"/>
-              </a:spcBef>
-              <a:spcAft>
-                <a:spcPct val="0"/>
-              </a:spcAft>
-              <a:buNone/>
-              <a:defRPr lang="fr-FR" sz="2667" b="0" kern="1200" cap="all" baseline="0" noProof="0" dirty="0">
-                <a:solidFill>
-                  <a:schemeClr val="bg2"/>
-                </a:solidFill>
-                <a:latin typeface="+mj-lt"/>
-                <a:ea typeface="+mj-ea"/>
-                <a:cs typeface="Arial" pitchFamily="34" charset="0"/>
-              </a:defRPr>
-            </a:lvl1pPr>
-          </a:lstStyle>
-          <a:p>
-            <a:pPr>
-              <a:spcAft>
-                <a:spcPts val="600"/>
-              </a:spcAft>
-            </a:pPr>
-            <a:r>
-              <a:rPr lang="en-US" b="0" kern="1200" cap="all" baseline="0" noProof="0" dirty="0">
-                <a:latin typeface="+mj-lt"/>
-                <a:ea typeface="+mj-ea"/>
-                <a:cs typeface="Arial" pitchFamily="34" charset="0"/>
-              </a:rPr>
-              <a:t>model</a:t>
-            </a:r>
-          </a:p>
-        </p:txBody>
-      </p:sp>
-      <p:sp>
-        <p:nvSpPr>
-          <p:cNvPr id="9" name="Text Placeholder 2">
-            <a:extLst>
-              <a:ext uri="{FF2B5EF4-FFF2-40B4-BE49-F238E27FC236}">
-                <a16:creationId xmlns:a16="http://schemas.microsoft.com/office/drawing/2014/main" id="{491E5982-AC8C-F304-4C80-0BB1810F5E65}"/>
-              </a:ext>
-            </a:extLst>
-          </p:cNvPr>
-          <p:cNvSpPr>
-            <a:spLocks noGrp="1"/>
-          </p:cNvSpPr>
-          <p:nvPr>
-            <p:ph type="body" sz="quarter" idx="13"/>
-          </p:nvPr>
-        </p:nvSpPr>
-        <p:spPr>
-          <a:xfrm>
-            <a:off x="432000" y="6000001"/>
-            <a:ext cx="11328000" cy="192097"/>
-          </a:xfrm>
-        </p:spPr>
-        <p:txBody>
-          <a:bodyPr/>
-          <a:lstStyle/>
-          <a:p>
-            <a:endParaRPr lang="en-US"/>
-          </a:p>
-        </p:txBody>
-      </p:sp>
-      <p:pic>
-        <p:nvPicPr>
-          <p:cNvPr id="4" name="Picture 3" descr="A diagram of different types of pills&#10;&#10;AI-generated content may be incorrect.">
-            <a:extLst>
-              <a:ext uri="{FF2B5EF4-FFF2-40B4-BE49-F238E27FC236}">
-                <a16:creationId xmlns:a16="http://schemas.microsoft.com/office/drawing/2014/main" id="{550AF86D-4DF9-4BCC-9DF3-64C53C3D3E86}"/>
-              </a:ext>
-            </a:extLst>
-          </p:cNvPr>
-          <p:cNvPicPr>
-            <a:picLocks noChangeAspect="1"/>
-          </p:cNvPicPr>
-          <p:nvPr/>
-        </p:nvPicPr>
-        <p:blipFill>
-          <a:blip r:embed="rId2">
-            <a:extLst>
-              <a:ext uri="{28A0092B-C50C-407E-A947-70E740481C1C}">
-                <a14:useLocalDpi xmlns:a14="http://schemas.microsoft.com/office/drawing/2010/main" val="0"/>
-              </a:ext>
-            </a:extLst>
-          </a:blip>
-          <a:stretch>
-            <a:fillRect/>
-          </a:stretch>
-        </p:blipFill>
-        <p:spPr>
-          <a:xfrm>
-            <a:off x="2704338" y="1535113"/>
-            <a:ext cx="6783324" cy="3951287"/>
-          </a:xfrm>
-          <a:prstGeom prst="rect">
-            <a:avLst/>
-          </a:prstGeom>
-          <a:noFill/>
-        </p:spPr>
-      </p:pic>
-    </p:spTree>
-    <p:extLst>
-      <p:ext uri="{BB962C8B-B14F-4D97-AF65-F5344CB8AC3E}">
-        <p14:creationId xmlns:p14="http://schemas.microsoft.com/office/powerpoint/2010/main" val="2232843083"/>
       </p:ext>
     </p:extLst>
   </p:cSld>
@@ -26126,6 +26122,15 @@
 </file>
 
 <file path=customXml/item2.xml><?xml version="1.0" encoding="utf-8"?>
+<?mso-contentType ?>
+<FormTemplates xmlns="http://schemas.microsoft.com/sharepoint/v3/contenttype/forms">
+  <Display>DocumentLibraryForm</Display>
+  <Edit>DocumentLibraryForm</Edit>
+  <New>DocumentLibraryForm</New>
+</FormTemplates>
+</file>
+
+<file path=customXml/item3.xml><?xml version="1.0" encoding="utf-8"?>
 <ct:contentTypeSchema xmlns:ct="http://schemas.microsoft.com/office/2006/metadata/contentType" xmlns:ma="http://schemas.microsoft.com/office/2006/metadata/properties/metaAttributes" ct:_="" ma:_="" ma:contentTypeName="Document" ma:contentTypeID="0x01010028E8A7D8F68DCC4FB34140E959084D74" ma:contentTypeVersion="10" ma:contentTypeDescription="Create a new document." ma:contentTypeScope="" ma:versionID="4e2d38642cfff7abb5bfe8ace3aae1fe">
   <xsd:schema xmlns:xsd="http://www.w3.org/2001/XMLSchema" xmlns:xs="http://www.w3.org/2001/XMLSchema" xmlns:p="http://schemas.microsoft.com/office/2006/metadata/properties" xmlns:ns3="1012d3dc-db0a-4fdb-bd73-705f626f82af" targetNamespace="http://schemas.microsoft.com/office/2006/metadata/properties" ma:root="true" ma:fieldsID="af65f71466f7736f07e7cdaa8da643df" ns3:_="">
     <xsd:import namespace="1012d3dc-db0a-4fdb-bd73-705f626f82af"/>
@@ -26307,15 +26312,6 @@
 </ct:contentTypeSchema>
 </file>
 
-<file path=customXml/item3.xml><?xml version="1.0" encoding="utf-8"?>
-<?mso-contentType ?>
-<FormTemplates xmlns="http://schemas.microsoft.com/sharepoint/v3/contenttype/forms">
-  <Display>DocumentLibraryForm</Display>
-  <Edit>DocumentLibraryForm</Edit>
-  <New>DocumentLibraryForm</New>
-</FormTemplates>
-</file>
-
 <file path=customXml/itemProps1.xml><?xml version="1.0" encoding="utf-8"?>
 <ds:datastoreItem xmlns:ds="http://schemas.openxmlformats.org/officeDocument/2006/customXml" ds:itemID="{150BD874-9FA9-408A-8781-E5ED3EDA213D}">
   <ds:schemaRefs>
@@ -26333,6 +26329,14 @@
 </file>
 
 <file path=customXml/itemProps2.xml><?xml version="1.0" encoding="utf-8"?>
+<ds:datastoreItem xmlns:ds="http://schemas.openxmlformats.org/officeDocument/2006/customXml" ds:itemID="{0A728A14-8803-4D26-A0C0-5F2AB80B51BC}">
+  <ds:schemaRefs>
+    <ds:schemaRef ds:uri="http://schemas.microsoft.com/sharepoint/v3/contenttype/forms"/>
+  </ds:schemaRefs>
+</ds:datastoreItem>
+</file>
+
+<file path=customXml/itemProps3.xml><?xml version="1.0" encoding="utf-8"?>
 <ds:datastoreItem xmlns:ds="http://schemas.openxmlformats.org/officeDocument/2006/customXml" ds:itemID="{EEB5D7D7-226C-4B3B-9CBB-A7FAF7777F95}">
   <ds:schemaRefs>
     <ds:schemaRef ds:uri="1012d3dc-db0a-4fdb-bd73-705f626f82af"/>
@@ -26348,12 +26352,4 @@
     <ds:schemaRef ds:uri="http://www.w3.org/2001/XMLSchema"/>
   </ds:schemaRefs>
 </ds:datastoreItem>
-</file>
-
-<file path=customXml/itemProps3.xml><?xml version="1.0" encoding="utf-8"?>
-<ds:datastoreItem xmlns:ds="http://schemas.openxmlformats.org/officeDocument/2006/customXml" ds:itemID="{0A728A14-8803-4D26-A0C0-5F2AB80B51BC}">
-  <ds:schemaRefs>
-    <ds:schemaRef ds:uri="http://schemas.microsoft.com/sharepoint/v3/contenttype/forms"/>
-  </ds:schemaRefs>
-</ds:datastoreItem>
 </file>